--- a/docs/pptx/whole/ritu-linsubhr-ratio-anemia3_10pct.pptx
+++ b/docs/pptx/whole/ritu-linsubhr-ratio-anemia3_10pct.pptx
@@ -3390,557 +3390,557 @@
           <p:spPr>
             <a:xfrm>
               <a:off x="1172049" y="2073503"/>
-              <a:ext cx="7090630" cy="3445863"/>
+              <a:ext cx="7090630" cy="3445696"/>
             </a:xfrm>
             <a:custGeom>
               <a:avLst/>
               <a:pathLst>
-                <a:path w="7090630" h="3445863">
+                <a:path w="7090630" h="3445696">
                   <a:moveTo>
-                    <a:pt x="1305710" y="0"/>
+                    <a:pt x="1303051" y="0"/>
                   </a:moveTo>
                   <a:lnTo>
-                    <a:pt x="1360827" y="147796"/>
-                  </a:lnTo>
-                  <a:lnTo>
-                    <a:pt x="1432450" y="329396"/>
-                  </a:lnTo>
-                  <a:lnTo>
-                    <a:pt x="1504073" y="501110"/>
-                  </a:lnTo>
-                  <a:lnTo>
-                    <a:pt x="1575695" y="663477"/>
-                  </a:lnTo>
-                  <a:lnTo>
-                    <a:pt x="1647318" y="817005"/>
-                  </a:lnTo>
-                  <a:lnTo>
-                    <a:pt x="1718940" y="962175"/>
-                  </a:lnTo>
-                  <a:lnTo>
-                    <a:pt x="1790563" y="1099442"/>
-                  </a:lnTo>
-                  <a:lnTo>
-                    <a:pt x="1862185" y="1229237"/>
-                  </a:lnTo>
-                  <a:lnTo>
-                    <a:pt x="1933808" y="1351967"/>
-                  </a:lnTo>
-                  <a:lnTo>
-                    <a:pt x="2005430" y="1468015"/>
-                  </a:lnTo>
-                  <a:lnTo>
-                    <a:pt x="2077053" y="1577746"/>
-                  </a:lnTo>
-                  <a:lnTo>
-                    <a:pt x="2148675" y="1681503"/>
-                  </a:lnTo>
-                  <a:lnTo>
-                    <a:pt x="2220298" y="1779612"/>
-                  </a:lnTo>
-                  <a:lnTo>
-                    <a:pt x="2291920" y="1872381"/>
-                  </a:lnTo>
-                  <a:lnTo>
-                    <a:pt x="2363543" y="1960099"/>
-                  </a:lnTo>
-                  <a:lnTo>
-                    <a:pt x="2435165" y="2043042"/>
-                  </a:lnTo>
-                  <a:lnTo>
-                    <a:pt x="2506788" y="2121470"/>
-                  </a:lnTo>
-                  <a:lnTo>
-                    <a:pt x="2578410" y="2195629"/>
-                  </a:lnTo>
-                  <a:lnTo>
-                    <a:pt x="2650033" y="2265750"/>
-                  </a:lnTo>
-                  <a:lnTo>
-                    <a:pt x="2721655" y="2332055"/>
-                  </a:lnTo>
-                  <a:lnTo>
-                    <a:pt x="2793278" y="2394750"/>
-                  </a:lnTo>
-                  <a:lnTo>
-                    <a:pt x="2864901" y="2454032"/>
-                  </a:lnTo>
-                  <a:lnTo>
-                    <a:pt x="2936523" y="2510087"/>
-                  </a:lnTo>
-                  <a:lnTo>
-                    <a:pt x="3008146" y="2563090"/>
-                  </a:lnTo>
-                  <a:lnTo>
-                    <a:pt x="3079768" y="2613208"/>
-                  </a:lnTo>
-                  <a:lnTo>
-                    <a:pt x="3151391" y="2655819"/>
-                  </a:lnTo>
-                  <a:lnTo>
-                    <a:pt x="3223013" y="2666983"/>
-                  </a:lnTo>
-                  <a:lnTo>
-                    <a:pt x="3294636" y="2677996"/>
-                  </a:lnTo>
-                  <a:lnTo>
-                    <a:pt x="3366258" y="2688861"/>
-                  </a:lnTo>
-                  <a:lnTo>
-                    <a:pt x="3437881" y="2699579"/>
-                  </a:lnTo>
-                  <a:lnTo>
-                    <a:pt x="3509503" y="2710153"/>
-                  </a:lnTo>
-                  <a:lnTo>
-                    <a:pt x="3581126" y="2720584"/>
-                  </a:lnTo>
-                  <a:lnTo>
-                    <a:pt x="3652748" y="2730875"/>
-                  </a:lnTo>
-                  <a:lnTo>
-                    <a:pt x="3724371" y="2741027"/>
-                  </a:lnTo>
-                  <a:lnTo>
-                    <a:pt x="3795993" y="2751042"/>
-                  </a:lnTo>
-                  <a:lnTo>
-                    <a:pt x="3867616" y="2760922"/>
-                  </a:lnTo>
-                  <a:lnTo>
-                    <a:pt x="3939238" y="2770668"/>
-                  </a:lnTo>
-                  <a:lnTo>
-                    <a:pt x="4010861" y="2780284"/>
-                  </a:lnTo>
-                  <a:lnTo>
-                    <a:pt x="4082483" y="2789769"/>
-                  </a:lnTo>
-                  <a:lnTo>
-                    <a:pt x="4154106" y="2799127"/>
-                  </a:lnTo>
-                  <a:lnTo>
-                    <a:pt x="4225729" y="2808358"/>
-                  </a:lnTo>
-                  <a:lnTo>
-                    <a:pt x="4297351" y="2817465"/>
-                  </a:lnTo>
-                  <a:lnTo>
-                    <a:pt x="4368974" y="2826450"/>
-                  </a:lnTo>
-                  <a:lnTo>
-                    <a:pt x="4440596" y="2835313"/>
-                  </a:lnTo>
-                  <a:lnTo>
-                    <a:pt x="4512219" y="2844056"/>
-                  </a:lnTo>
-                  <a:lnTo>
-                    <a:pt x="4583841" y="2852682"/>
-                  </a:lnTo>
-                  <a:lnTo>
-                    <a:pt x="4655464" y="2861191"/>
-                  </a:lnTo>
-                  <a:lnTo>
-                    <a:pt x="4727086" y="2869586"/>
-                  </a:lnTo>
-                  <a:lnTo>
-                    <a:pt x="4798709" y="2877867"/>
-                  </a:lnTo>
-                  <a:lnTo>
-                    <a:pt x="4870331" y="2886037"/>
-                  </a:lnTo>
-                  <a:lnTo>
-                    <a:pt x="4941954" y="2894097"/>
-                  </a:lnTo>
-                  <a:lnTo>
-                    <a:pt x="5013576" y="2902048"/>
-                  </a:lnTo>
-                  <a:lnTo>
-                    <a:pt x="5085199" y="2909891"/>
-                  </a:lnTo>
-                  <a:lnTo>
-                    <a:pt x="5156821" y="2917629"/>
-                  </a:lnTo>
-                  <a:lnTo>
-                    <a:pt x="5228444" y="2925263"/>
-                  </a:lnTo>
-                  <a:lnTo>
-                    <a:pt x="5300066" y="2932793"/>
-                  </a:lnTo>
-                  <a:lnTo>
-                    <a:pt x="5371689" y="2940223"/>
-                  </a:lnTo>
-                  <a:lnTo>
-                    <a:pt x="5443311" y="2947552"/>
-                  </a:lnTo>
-                  <a:lnTo>
-                    <a:pt x="5514934" y="2954782"/>
-                  </a:lnTo>
-                  <a:lnTo>
-                    <a:pt x="5586557" y="2961914"/>
-                  </a:lnTo>
-                  <a:lnTo>
-                    <a:pt x="5658179" y="2968951"/>
-                  </a:lnTo>
-                  <a:lnTo>
-                    <a:pt x="5729802" y="2975892"/>
-                  </a:lnTo>
-                  <a:lnTo>
-                    <a:pt x="5801424" y="2982740"/>
-                  </a:lnTo>
-                  <a:lnTo>
-                    <a:pt x="5873047" y="2989496"/>
-                  </a:lnTo>
-                  <a:lnTo>
-                    <a:pt x="5944669" y="2996161"/>
-                  </a:lnTo>
-                  <a:lnTo>
-                    <a:pt x="6016292" y="3002735"/>
-                  </a:lnTo>
-                  <a:lnTo>
-                    <a:pt x="6087914" y="3009221"/>
-                  </a:lnTo>
-                  <a:lnTo>
-                    <a:pt x="6159537" y="3015620"/>
-                  </a:lnTo>
-                  <a:lnTo>
-                    <a:pt x="6231159" y="3021932"/>
-                  </a:lnTo>
-                  <a:lnTo>
-                    <a:pt x="6302782" y="3028159"/>
-                  </a:lnTo>
-                  <a:lnTo>
-                    <a:pt x="6374404" y="3034302"/>
-                  </a:lnTo>
-                  <a:lnTo>
-                    <a:pt x="6446027" y="3040363"/>
-                  </a:lnTo>
-                  <a:lnTo>
-                    <a:pt x="6517649" y="3046341"/>
-                  </a:lnTo>
-                  <a:lnTo>
-                    <a:pt x="6589272" y="3052239"/>
-                  </a:lnTo>
-                  <a:lnTo>
-                    <a:pt x="6660894" y="3058058"/>
-                  </a:lnTo>
-                  <a:lnTo>
-                    <a:pt x="6732517" y="3063798"/>
-                  </a:lnTo>
-                  <a:lnTo>
-                    <a:pt x="6804139" y="3069461"/>
-                  </a:lnTo>
-                  <a:lnTo>
-                    <a:pt x="6875762" y="3075047"/>
-                  </a:lnTo>
-                  <a:lnTo>
-                    <a:pt x="6947385" y="3080558"/>
-                  </a:lnTo>
-                  <a:lnTo>
-                    <a:pt x="7019007" y="3085995"/>
-                  </a:lnTo>
-                  <a:lnTo>
-                    <a:pt x="7090630" y="3091358"/>
-                  </a:lnTo>
-                  <a:lnTo>
-                    <a:pt x="7090630" y="3445863"/>
-                  </a:lnTo>
-                  <a:lnTo>
-                    <a:pt x="7019007" y="3443682"/>
-                  </a:lnTo>
-                  <a:lnTo>
-                    <a:pt x="6947385" y="3441376"/>
-                  </a:lnTo>
-                  <a:lnTo>
-                    <a:pt x="6875762" y="3438936"/>
-                  </a:lnTo>
-                  <a:lnTo>
-                    <a:pt x="6804139" y="3436356"/>
-                  </a:lnTo>
-                  <a:lnTo>
-                    <a:pt x="6732517" y="3433628"/>
-                  </a:lnTo>
-                  <a:lnTo>
-                    <a:pt x="6660894" y="3430743"/>
-                  </a:lnTo>
-                  <a:lnTo>
-                    <a:pt x="6589272" y="3427691"/>
-                  </a:lnTo>
-                  <a:lnTo>
-                    <a:pt x="6517649" y="3424464"/>
-                  </a:lnTo>
-                  <a:lnTo>
-                    <a:pt x="6446027" y="3421051"/>
-                  </a:lnTo>
-                  <a:lnTo>
-                    <a:pt x="6374404" y="3417442"/>
-                  </a:lnTo>
-                  <a:lnTo>
-                    <a:pt x="6302782" y="3413625"/>
-                  </a:lnTo>
-                  <a:lnTo>
-                    <a:pt x="6231159" y="3409587"/>
-                  </a:lnTo>
-                  <a:lnTo>
-                    <a:pt x="6159537" y="3405318"/>
-                  </a:lnTo>
-                  <a:lnTo>
-                    <a:pt x="6087914" y="3400803"/>
-                  </a:lnTo>
-                  <a:lnTo>
-                    <a:pt x="6016292" y="3396028"/>
-                  </a:lnTo>
-                  <a:lnTo>
-                    <a:pt x="5944669" y="3390978"/>
-                  </a:lnTo>
-                  <a:lnTo>
-                    <a:pt x="5873047" y="3385637"/>
-                  </a:lnTo>
-                  <a:lnTo>
-                    <a:pt x="5801424" y="3379988"/>
-                  </a:lnTo>
-                  <a:lnTo>
-                    <a:pt x="5729802" y="3374015"/>
-                  </a:lnTo>
-                  <a:lnTo>
-                    <a:pt x="5658179" y="3367698"/>
-                  </a:lnTo>
-                  <a:lnTo>
-                    <a:pt x="5586557" y="3361017"/>
-                  </a:lnTo>
-                  <a:lnTo>
-                    <a:pt x="5514934" y="3353951"/>
-                  </a:lnTo>
-                  <a:lnTo>
-                    <a:pt x="5443311" y="3346478"/>
-                  </a:lnTo>
-                  <a:lnTo>
-                    <a:pt x="5371689" y="3338576"/>
-                  </a:lnTo>
-                  <a:lnTo>
-                    <a:pt x="5300066" y="3330218"/>
-                  </a:lnTo>
-                  <a:lnTo>
-                    <a:pt x="5228444" y="3321379"/>
-                  </a:lnTo>
-                  <a:lnTo>
-                    <a:pt x="5156821" y="3312031"/>
-                  </a:lnTo>
-                  <a:lnTo>
-                    <a:pt x="5085199" y="3302146"/>
-                  </a:lnTo>
-                  <a:lnTo>
-                    <a:pt x="5013576" y="3291691"/>
-                  </a:lnTo>
-                  <a:lnTo>
-                    <a:pt x="4941954" y="3280634"/>
-                  </a:lnTo>
-                  <a:lnTo>
-                    <a:pt x="4870331" y="3268940"/>
-                  </a:lnTo>
-                  <a:lnTo>
-                    <a:pt x="4798709" y="3256574"/>
-                  </a:lnTo>
-                  <a:lnTo>
-                    <a:pt x="4727086" y="3243495"/>
-                  </a:lnTo>
-                  <a:lnTo>
-                    <a:pt x="4655464" y="3229663"/>
-                  </a:lnTo>
-                  <a:lnTo>
-                    <a:pt x="4583841" y="3215035"/>
-                  </a:lnTo>
-                  <a:lnTo>
-                    <a:pt x="4512219" y="3199565"/>
-                  </a:lnTo>
-                  <a:lnTo>
-                    <a:pt x="4440596" y="3183205"/>
-                  </a:lnTo>
-                  <a:lnTo>
-                    <a:pt x="4368974" y="3165902"/>
-                  </a:lnTo>
-                  <a:lnTo>
-                    <a:pt x="4297351" y="3147604"/>
-                  </a:lnTo>
-                  <a:lnTo>
-                    <a:pt x="4225729" y="3128251"/>
-                  </a:lnTo>
-                  <a:lnTo>
-                    <a:pt x="4154106" y="3107785"/>
-                  </a:lnTo>
-                  <a:lnTo>
-                    <a:pt x="4082483" y="3086140"/>
-                  </a:lnTo>
-                  <a:lnTo>
-                    <a:pt x="4010861" y="3063250"/>
-                  </a:lnTo>
-                  <a:lnTo>
-                    <a:pt x="3939238" y="3039041"/>
-                  </a:lnTo>
-                  <a:lnTo>
-                    <a:pt x="3867616" y="3013439"/>
-                  </a:lnTo>
-                  <a:lnTo>
-                    <a:pt x="3795993" y="2986363"/>
-                  </a:lnTo>
-                  <a:lnTo>
-                    <a:pt x="3724371" y="2957728"/>
-                  </a:lnTo>
-                  <a:lnTo>
-                    <a:pt x="3652748" y="2927444"/>
-                  </a:lnTo>
-                  <a:lnTo>
-                    <a:pt x="3581126" y="2895417"/>
-                  </a:lnTo>
-                  <a:lnTo>
-                    <a:pt x="3509503" y="2861546"/>
-                  </a:lnTo>
-                  <a:lnTo>
-                    <a:pt x="3437881" y="2825725"/>
-                  </a:lnTo>
-                  <a:lnTo>
-                    <a:pt x="3366258" y="2787842"/>
-                  </a:lnTo>
-                  <a:lnTo>
-                    <a:pt x="3294636" y="2747778"/>
-                  </a:lnTo>
-                  <a:lnTo>
-                    <a:pt x="3223013" y="2705408"/>
-                  </a:lnTo>
-                  <a:lnTo>
-                    <a:pt x="3151391" y="2660598"/>
-                  </a:lnTo>
-                  <a:lnTo>
-                    <a:pt x="3079768" y="2644502"/>
-                  </a:lnTo>
-                  <a:lnTo>
-                    <a:pt x="3008146" y="2633031"/>
-                  </a:lnTo>
-                  <a:lnTo>
-                    <a:pt x="2936523" y="2621403"/>
-                  </a:lnTo>
-                  <a:lnTo>
-                    <a:pt x="2864901" y="2609616"/>
-                  </a:lnTo>
-                  <a:lnTo>
-                    <a:pt x="2793278" y="2597668"/>
-                  </a:lnTo>
-                  <a:lnTo>
-                    <a:pt x="2721655" y="2585557"/>
-                  </a:lnTo>
-                  <a:lnTo>
-                    <a:pt x="2650033" y="2573280"/>
-                  </a:lnTo>
-                  <a:lnTo>
-                    <a:pt x="2578410" y="2560836"/>
-                  </a:lnTo>
-                  <a:lnTo>
-                    <a:pt x="2506788" y="2548221"/>
-                  </a:lnTo>
-                  <a:lnTo>
-                    <a:pt x="2435165" y="2535434"/>
-                  </a:lnTo>
-                  <a:lnTo>
-                    <a:pt x="2363543" y="2522472"/>
-                  </a:lnTo>
-                  <a:lnTo>
-                    <a:pt x="2291920" y="2509333"/>
-                  </a:lnTo>
-                  <a:lnTo>
-                    <a:pt x="2220298" y="2496014"/>
-                  </a:lnTo>
-                  <a:lnTo>
-                    <a:pt x="2148675" y="2482513"/>
-                  </a:lnTo>
-                  <a:lnTo>
-                    <a:pt x="2077053" y="2468828"/>
-                  </a:lnTo>
-                  <a:lnTo>
-                    <a:pt x="2005430" y="2454955"/>
-                  </a:lnTo>
-                  <a:lnTo>
-                    <a:pt x="1933808" y="2440893"/>
-                  </a:lnTo>
-                  <a:lnTo>
-                    <a:pt x="1862185" y="2426639"/>
-                  </a:lnTo>
-                  <a:lnTo>
-                    <a:pt x="1790563" y="2412190"/>
-                  </a:lnTo>
-                  <a:lnTo>
-                    <a:pt x="1718940" y="2397544"/>
-                  </a:lnTo>
-                  <a:lnTo>
-                    <a:pt x="1647318" y="2382697"/>
-                  </a:lnTo>
-                  <a:lnTo>
-                    <a:pt x="1575695" y="2367647"/>
-                  </a:lnTo>
-                  <a:lnTo>
-                    <a:pt x="1504073" y="2352392"/>
-                  </a:lnTo>
-                  <a:lnTo>
-                    <a:pt x="1432450" y="2336928"/>
-                  </a:lnTo>
-                  <a:lnTo>
-                    <a:pt x="1360827" y="2321253"/>
-                  </a:lnTo>
-                  <a:lnTo>
-                    <a:pt x="1289205" y="2305363"/>
-                  </a:lnTo>
-                  <a:lnTo>
-                    <a:pt x="1217582" y="2289257"/>
-                  </a:lnTo>
-                  <a:lnTo>
-                    <a:pt x="1145960" y="2272930"/>
-                  </a:lnTo>
-                  <a:lnTo>
-                    <a:pt x="1074337" y="2256380"/>
-                  </a:lnTo>
-                  <a:lnTo>
-                    <a:pt x="1002715" y="2239604"/>
-                  </a:lnTo>
-                  <a:lnTo>
-                    <a:pt x="931092" y="2222598"/>
-                  </a:lnTo>
-                  <a:lnTo>
-                    <a:pt x="859470" y="2205360"/>
-                  </a:lnTo>
-                  <a:lnTo>
-                    <a:pt x="787847" y="2187887"/>
-                  </a:lnTo>
-                  <a:lnTo>
-                    <a:pt x="716225" y="2170174"/>
-                  </a:lnTo>
-                  <a:lnTo>
-                    <a:pt x="644602" y="2152220"/>
-                  </a:lnTo>
-                  <a:lnTo>
-                    <a:pt x="572980" y="2134020"/>
-                  </a:lnTo>
-                  <a:lnTo>
-                    <a:pt x="501357" y="2115571"/>
-                  </a:lnTo>
-                  <a:lnTo>
-                    <a:pt x="429735" y="2096870"/>
-                  </a:lnTo>
-                  <a:lnTo>
-                    <a:pt x="358112" y="2077914"/>
-                  </a:lnTo>
-                  <a:lnTo>
-                    <a:pt x="286490" y="2058699"/>
-                  </a:lnTo>
-                  <a:lnTo>
-                    <a:pt x="214867" y="2039220"/>
-                  </a:lnTo>
-                  <a:lnTo>
-                    <a:pt x="143245" y="2019476"/>
-                  </a:lnTo>
-                  <a:lnTo>
-                    <a:pt x="71622" y="1999462"/>
-                  </a:lnTo>
-                  <a:lnTo>
-                    <a:pt x="0" y="1979174"/>
+                    <a:pt x="1360827" y="154394"/>
+                  </a:lnTo>
+                  <a:lnTo>
+                    <a:pt x="1432450" y="335384"/>
+                  </a:lnTo>
+                  <a:lnTo>
+                    <a:pt x="1504073" y="506535"/>
+                  </a:lnTo>
+                  <a:lnTo>
+                    <a:pt x="1575695" y="668383"/>
+                  </a:lnTo>
+                  <a:lnTo>
+                    <a:pt x="1647318" y="821431"/>
+                  </a:lnTo>
+                  <a:lnTo>
+                    <a:pt x="1718940" y="966160"/>
+                  </a:lnTo>
+                  <a:lnTo>
+                    <a:pt x="1790563" y="1103021"/>
+                  </a:lnTo>
+                  <a:lnTo>
+                    <a:pt x="1862185" y="1232442"/>
+                  </a:lnTo>
+                  <a:lnTo>
+                    <a:pt x="1933808" y="1354827"/>
+                  </a:lnTo>
+                  <a:lnTo>
+                    <a:pt x="2005430" y="1470559"/>
+                  </a:lnTo>
+                  <a:lnTo>
+                    <a:pt x="2077053" y="1580000"/>
+                  </a:lnTo>
+                  <a:lnTo>
+                    <a:pt x="2148675" y="1683492"/>
+                  </a:lnTo>
+                  <a:lnTo>
+                    <a:pt x="2220298" y="1781357"/>
+                  </a:lnTo>
+                  <a:lnTo>
+                    <a:pt x="2291920" y="1873902"/>
+                  </a:lnTo>
+                  <a:lnTo>
+                    <a:pt x="2363543" y="1961416"/>
+                  </a:lnTo>
+                  <a:lnTo>
+                    <a:pt x="2435165" y="2044173"/>
+                  </a:lnTo>
+                  <a:lnTo>
+                    <a:pt x="2506788" y="2122431"/>
+                  </a:lnTo>
+                  <a:lnTo>
+                    <a:pt x="2578410" y="2196435"/>
+                  </a:lnTo>
+                  <a:lnTo>
+                    <a:pt x="2650033" y="2266416"/>
+                  </a:lnTo>
+                  <a:lnTo>
+                    <a:pt x="2721655" y="2332592"/>
+                  </a:lnTo>
+                  <a:lnTo>
+                    <a:pt x="2793278" y="2395171"/>
+                  </a:lnTo>
+                  <a:lnTo>
+                    <a:pt x="2864901" y="2454348"/>
+                  </a:lnTo>
+                  <a:lnTo>
+                    <a:pt x="2936523" y="2510309"/>
+                  </a:lnTo>
+                  <a:lnTo>
+                    <a:pt x="3008146" y="2563227"/>
+                  </a:lnTo>
+                  <a:lnTo>
+                    <a:pt x="3079768" y="2613268"/>
+                  </a:lnTo>
+                  <a:lnTo>
+                    <a:pt x="3151391" y="2655815"/>
+                  </a:lnTo>
+                  <a:lnTo>
+                    <a:pt x="3223013" y="2666947"/>
+                  </a:lnTo>
+                  <a:lnTo>
+                    <a:pt x="3294636" y="2677930"/>
+                  </a:lnTo>
+                  <a:lnTo>
+                    <a:pt x="3366258" y="2688765"/>
+                  </a:lnTo>
+                  <a:lnTo>
+                    <a:pt x="3437881" y="2699455"/>
+                  </a:lnTo>
+                  <a:lnTo>
+                    <a:pt x="3509503" y="2710001"/>
+                  </a:lnTo>
+                  <a:lnTo>
+                    <a:pt x="3581126" y="2720405"/>
+                  </a:lnTo>
+                  <a:lnTo>
+                    <a:pt x="3652748" y="2730669"/>
+                  </a:lnTo>
+                  <a:lnTo>
+                    <a:pt x="3724371" y="2740795"/>
+                  </a:lnTo>
+                  <a:lnTo>
+                    <a:pt x="3795993" y="2750785"/>
+                  </a:lnTo>
+                  <a:lnTo>
+                    <a:pt x="3867616" y="2760641"/>
+                  </a:lnTo>
+                  <a:lnTo>
+                    <a:pt x="3939238" y="2770364"/>
+                  </a:lnTo>
+                  <a:lnTo>
+                    <a:pt x="4010861" y="2779956"/>
+                  </a:lnTo>
+                  <a:lnTo>
+                    <a:pt x="4082483" y="2789419"/>
+                  </a:lnTo>
+                  <a:lnTo>
+                    <a:pt x="4154106" y="2798756"/>
+                  </a:lnTo>
+                  <a:lnTo>
+                    <a:pt x="4225729" y="2807966"/>
+                  </a:lnTo>
+                  <a:lnTo>
+                    <a:pt x="4297351" y="2817053"/>
+                  </a:lnTo>
+                  <a:lnTo>
+                    <a:pt x="4368974" y="2826017"/>
+                  </a:lnTo>
+                  <a:lnTo>
+                    <a:pt x="4440596" y="2834861"/>
+                  </a:lnTo>
+                  <a:lnTo>
+                    <a:pt x="4512219" y="2843587"/>
+                  </a:lnTo>
+                  <a:lnTo>
+                    <a:pt x="4583841" y="2852194"/>
+                  </a:lnTo>
+                  <a:lnTo>
+                    <a:pt x="4655464" y="2860686"/>
+                  </a:lnTo>
+                  <a:lnTo>
+                    <a:pt x="4727086" y="2869064"/>
+                  </a:lnTo>
+                  <a:lnTo>
+                    <a:pt x="4798709" y="2877329"/>
+                  </a:lnTo>
+                  <a:lnTo>
+                    <a:pt x="4870331" y="2885484"/>
+                  </a:lnTo>
+                  <a:lnTo>
+                    <a:pt x="4941954" y="2893528"/>
+                  </a:lnTo>
+                  <a:lnTo>
+                    <a:pt x="5013576" y="2901464"/>
+                  </a:lnTo>
+                  <a:lnTo>
+                    <a:pt x="5085199" y="2909294"/>
+                  </a:lnTo>
+                  <a:lnTo>
+                    <a:pt x="5156821" y="2917018"/>
+                  </a:lnTo>
+                  <a:lnTo>
+                    <a:pt x="5228444" y="2924638"/>
+                  </a:lnTo>
+                  <a:lnTo>
+                    <a:pt x="5300066" y="2932156"/>
+                  </a:lnTo>
+                  <a:lnTo>
+                    <a:pt x="5371689" y="2939573"/>
+                  </a:lnTo>
+                  <a:lnTo>
+                    <a:pt x="5443311" y="2946890"/>
+                  </a:lnTo>
+                  <a:lnTo>
+                    <a:pt x="5514934" y="2954109"/>
+                  </a:lnTo>
+                  <a:lnTo>
+                    <a:pt x="5586557" y="2961231"/>
+                  </a:lnTo>
+                  <a:lnTo>
+                    <a:pt x="5658179" y="2968257"/>
+                  </a:lnTo>
+                  <a:lnTo>
+                    <a:pt x="5729802" y="2975188"/>
+                  </a:lnTo>
+                  <a:lnTo>
+                    <a:pt x="5801424" y="2982026"/>
+                  </a:lnTo>
+                  <a:lnTo>
+                    <a:pt x="5873047" y="2988773"/>
+                  </a:lnTo>
+                  <a:lnTo>
+                    <a:pt x="5944669" y="2995428"/>
+                  </a:lnTo>
+                  <a:lnTo>
+                    <a:pt x="6016292" y="3001994"/>
+                  </a:lnTo>
+                  <a:lnTo>
+                    <a:pt x="6087914" y="3008472"/>
+                  </a:lnTo>
+                  <a:lnTo>
+                    <a:pt x="6159537" y="3014863"/>
+                  </a:lnTo>
+                  <a:lnTo>
+                    <a:pt x="6231159" y="3021167"/>
+                  </a:lnTo>
+                  <a:lnTo>
+                    <a:pt x="6302782" y="3027387"/>
+                  </a:lnTo>
+                  <a:lnTo>
+                    <a:pt x="6374404" y="3033524"/>
+                  </a:lnTo>
+                  <a:lnTo>
+                    <a:pt x="6446027" y="3039578"/>
+                  </a:lnTo>
+                  <a:lnTo>
+                    <a:pt x="6517649" y="3045550"/>
+                  </a:lnTo>
+                  <a:lnTo>
+                    <a:pt x="6589272" y="3051442"/>
+                  </a:lnTo>
+                  <a:lnTo>
+                    <a:pt x="6660894" y="3057255"/>
+                  </a:lnTo>
+                  <a:lnTo>
+                    <a:pt x="6732517" y="3062990"/>
+                  </a:lnTo>
+                  <a:lnTo>
+                    <a:pt x="6804139" y="3068647"/>
+                  </a:lnTo>
+                  <a:lnTo>
+                    <a:pt x="6875762" y="3074229"/>
+                  </a:lnTo>
+                  <a:lnTo>
+                    <a:pt x="6947385" y="3079735"/>
+                  </a:lnTo>
+                  <a:lnTo>
+                    <a:pt x="7019007" y="3085168"/>
+                  </a:lnTo>
+                  <a:lnTo>
+                    <a:pt x="7090630" y="3090527"/>
+                  </a:lnTo>
+                  <a:lnTo>
+                    <a:pt x="7090630" y="3445696"/>
+                  </a:lnTo>
+                  <a:lnTo>
+                    <a:pt x="7019007" y="3443509"/>
+                  </a:lnTo>
+                  <a:lnTo>
+                    <a:pt x="6947385" y="3441196"/>
+                  </a:lnTo>
+                  <a:lnTo>
+                    <a:pt x="6875762" y="3438750"/>
+                  </a:lnTo>
+                  <a:lnTo>
+                    <a:pt x="6804139" y="3436163"/>
+                  </a:lnTo>
+                  <a:lnTo>
+                    <a:pt x="6732517" y="3433428"/>
+                  </a:lnTo>
+                  <a:lnTo>
+                    <a:pt x="6660894" y="3430535"/>
+                  </a:lnTo>
+                  <a:lnTo>
+                    <a:pt x="6589272" y="3427476"/>
+                  </a:lnTo>
+                  <a:lnTo>
+                    <a:pt x="6517649" y="3424241"/>
+                  </a:lnTo>
+                  <a:lnTo>
+                    <a:pt x="6446027" y="3420820"/>
+                  </a:lnTo>
+                  <a:lnTo>
+                    <a:pt x="6374404" y="3417203"/>
+                  </a:lnTo>
+                  <a:lnTo>
+                    <a:pt x="6302782" y="3413378"/>
+                  </a:lnTo>
+                  <a:lnTo>
+                    <a:pt x="6231159" y="3409332"/>
+                  </a:lnTo>
+                  <a:lnTo>
+                    <a:pt x="6159537" y="3405054"/>
+                  </a:lnTo>
+                  <a:lnTo>
+                    <a:pt x="6087914" y="3400531"/>
+                  </a:lnTo>
+                  <a:lnTo>
+                    <a:pt x="6016292" y="3395747"/>
+                  </a:lnTo>
+                  <a:lnTo>
+                    <a:pt x="5944669" y="3390688"/>
+                  </a:lnTo>
+                  <a:lnTo>
+                    <a:pt x="5873047" y="3385338"/>
+                  </a:lnTo>
+                  <a:lnTo>
+                    <a:pt x="5801424" y="3379681"/>
+                  </a:lnTo>
+                  <a:lnTo>
+                    <a:pt x="5729802" y="3373699"/>
+                  </a:lnTo>
+                  <a:lnTo>
+                    <a:pt x="5658179" y="3367372"/>
+                  </a:lnTo>
+                  <a:lnTo>
+                    <a:pt x="5586557" y="3360683"/>
+                  </a:lnTo>
+                  <a:lnTo>
+                    <a:pt x="5514934" y="3353608"/>
+                  </a:lnTo>
+                  <a:lnTo>
+                    <a:pt x="5443311" y="3346127"/>
+                  </a:lnTo>
+                  <a:lnTo>
+                    <a:pt x="5371689" y="3338215"/>
+                  </a:lnTo>
+                  <a:lnTo>
+                    <a:pt x="5300066" y="3329849"/>
+                  </a:lnTo>
+                  <a:lnTo>
+                    <a:pt x="5228444" y="3321002"/>
+                  </a:lnTo>
+                  <a:lnTo>
+                    <a:pt x="5156821" y="3311646"/>
+                  </a:lnTo>
+                  <a:lnTo>
+                    <a:pt x="5085199" y="3301753"/>
+                  </a:lnTo>
+                  <a:lnTo>
+                    <a:pt x="5013576" y="3291291"/>
+                  </a:lnTo>
+                  <a:lnTo>
+                    <a:pt x="4941954" y="3280227"/>
+                  </a:lnTo>
+                  <a:lnTo>
+                    <a:pt x="4870331" y="3268527"/>
+                  </a:lnTo>
+                  <a:lnTo>
+                    <a:pt x="4798709" y="3256155"/>
+                  </a:lnTo>
+                  <a:lnTo>
+                    <a:pt x="4727086" y="3243071"/>
+                  </a:lnTo>
+                  <a:lnTo>
+                    <a:pt x="4655464" y="3229235"/>
+                  </a:lnTo>
+                  <a:lnTo>
+                    <a:pt x="4583841" y="3214604"/>
+                  </a:lnTo>
+                  <a:lnTo>
+                    <a:pt x="4512219" y="3199132"/>
+                  </a:lnTo>
+                  <a:lnTo>
+                    <a:pt x="4440596" y="3182770"/>
+                  </a:lnTo>
+                  <a:lnTo>
+                    <a:pt x="4368974" y="3165468"/>
+                  </a:lnTo>
+                  <a:lnTo>
+                    <a:pt x="4297351" y="3147171"/>
+                  </a:lnTo>
+                  <a:lnTo>
+                    <a:pt x="4225729" y="3127823"/>
+                  </a:lnTo>
+                  <a:lnTo>
+                    <a:pt x="4154106" y="3107362"/>
+                  </a:lnTo>
+                  <a:lnTo>
+                    <a:pt x="4082483" y="3085724"/>
+                  </a:lnTo>
+                  <a:lnTo>
+                    <a:pt x="4010861" y="3062843"/>
+                  </a:lnTo>
+                  <a:lnTo>
+                    <a:pt x="3939238" y="3038647"/>
+                  </a:lnTo>
+                  <a:lnTo>
+                    <a:pt x="3867616" y="3013059"/>
+                  </a:lnTo>
+                  <a:lnTo>
+                    <a:pt x="3795993" y="2986001"/>
+                  </a:lnTo>
+                  <a:lnTo>
+                    <a:pt x="3724371" y="2957387"/>
+                  </a:lnTo>
+                  <a:lnTo>
+                    <a:pt x="3652748" y="2927128"/>
+                  </a:lnTo>
+                  <a:lnTo>
+                    <a:pt x="3581126" y="2895130"/>
+                  </a:lnTo>
+                  <a:lnTo>
+                    <a:pt x="3509503" y="2861292"/>
+                  </a:lnTo>
+                  <a:lnTo>
+                    <a:pt x="3437881" y="2825509"/>
+                  </a:lnTo>
+                  <a:lnTo>
+                    <a:pt x="3366258" y="2787669"/>
+                  </a:lnTo>
+                  <a:lnTo>
+                    <a:pt x="3294636" y="2747653"/>
+                  </a:lnTo>
+                  <a:lnTo>
+                    <a:pt x="3223013" y="2705337"/>
+                  </a:lnTo>
+                  <a:lnTo>
+                    <a:pt x="3151391" y="2660589"/>
+                  </a:lnTo>
+                  <a:lnTo>
+                    <a:pt x="3079768" y="2644530"/>
+                  </a:lnTo>
+                  <a:lnTo>
+                    <a:pt x="3008146" y="2633092"/>
+                  </a:lnTo>
+                  <a:lnTo>
+                    <a:pt x="2936523" y="2621498"/>
+                  </a:lnTo>
+                  <a:lnTo>
+                    <a:pt x="2864901" y="2609746"/>
+                  </a:lnTo>
+                  <a:lnTo>
+                    <a:pt x="2793278" y="2597834"/>
+                  </a:lnTo>
+                  <a:lnTo>
+                    <a:pt x="2721655" y="2585759"/>
+                  </a:lnTo>
+                  <a:lnTo>
+                    <a:pt x="2650033" y="2573520"/>
+                  </a:lnTo>
+                  <a:lnTo>
+                    <a:pt x="2578410" y="2561114"/>
+                  </a:lnTo>
+                  <a:lnTo>
+                    <a:pt x="2506788" y="2548539"/>
+                  </a:lnTo>
+                  <a:lnTo>
+                    <a:pt x="2435165" y="2535792"/>
+                  </a:lnTo>
+                  <a:lnTo>
+                    <a:pt x="2363543" y="2522872"/>
+                  </a:lnTo>
+                  <a:lnTo>
+                    <a:pt x="2291920" y="2509776"/>
+                  </a:lnTo>
+                  <a:lnTo>
+                    <a:pt x="2220298" y="2496501"/>
+                  </a:lnTo>
+                  <a:lnTo>
+                    <a:pt x="2148675" y="2483045"/>
+                  </a:lnTo>
+                  <a:lnTo>
+                    <a:pt x="2077053" y="2469406"/>
+                  </a:lnTo>
+                  <a:lnTo>
+                    <a:pt x="2005430" y="2455581"/>
+                  </a:lnTo>
+                  <a:lnTo>
+                    <a:pt x="1933808" y="2441568"/>
+                  </a:lnTo>
+                  <a:lnTo>
+                    <a:pt x="1862185" y="2427363"/>
+                  </a:lnTo>
+                  <a:lnTo>
+                    <a:pt x="1790563" y="2412965"/>
+                  </a:lnTo>
+                  <a:lnTo>
+                    <a:pt x="1718940" y="2398371"/>
+                  </a:lnTo>
+                  <a:lnTo>
+                    <a:pt x="1647318" y="2383578"/>
+                  </a:lnTo>
+                  <a:lnTo>
+                    <a:pt x="1575695" y="2368583"/>
+                  </a:lnTo>
+                  <a:lnTo>
+                    <a:pt x="1504073" y="2353383"/>
+                  </a:lnTo>
+                  <a:lnTo>
+                    <a:pt x="1432450" y="2337977"/>
+                  </a:lnTo>
+                  <a:lnTo>
+                    <a:pt x="1360827" y="2322361"/>
+                  </a:lnTo>
+                  <a:lnTo>
+                    <a:pt x="1289205" y="2306532"/>
+                  </a:lnTo>
+                  <a:lnTo>
+                    <a:pt x="1217582" y="2290487"/>
+                  </a:lnTo>
+                  <a:lnTo>
+                    <a:pt x="1145960" y="2274223"/>
+                  </a:lnTo>
+                  <a:lnTo>
+                    <a:pt x="1074337" y="2257738"/>
+                  </a:lnTo>
+                  <a:lnTo>
+                    <a:pt x="1002715" y="2241028"/>
+                  </a:lnTo>
+                  <a:lnTo>
+                    <a:pt x="931092" y="2224090"/>
+                  </a:lnTo>
+                  <a:lnTo>
+                    <a:pt x="859470" y="2206921"/>
+                  </a:lnTo>
+                  <a:lnTo>
+                    <a:pt x="787847" y="2189519"/>
+                  </a:lnTo>
+                  <a:lnTo>
+                    <a:pt x="716225" y="2171879"/>
+                  </a:lnTo>
+                  <a:lnTo>
+                    <a:pt x="644602" y="2153999"/>
+                  </a:lnTo>
+                  <a:lnTo>
+                    <a:pt x="572980" y="2135875"/>
+                  </a:lnTo>
+                  <a:lnTo>
+                    <a:pt x="501357" y="2117504"/>
+                  </a:lnTo>
+                  <a:lnTo>
+                    <a:pt x="429735" y="2098883"/>
+                  </a:lnTo>
+                  <a:lnTo>
+                    <a:pt x="358112" y="2080008"/>
+                  </a:lnTo>
+                  <a:lnTo>
+                    <a:pt x="286490" y="2060875"/>
+                  </a:lnTo>
+                  <a:lnTo>
+                    <a:pt x="214867" y="2041482"/>
+                  </a:lnTo>
+                  <a:lnTo>
+                    <a:pt x="143245" y="2021825"/>
+                  </a:lnTo>
+                  <a:lnTo>
+                    <a:pt x="71622" y="2001899"/>
+                  </a:lnTo>
+                  <a:lnTo>
+                    <a:pt x="0" y="1981702"/>
                   </a:lnTo>
                   <a:close/>
                 </a:path>
@@ -3966,258 +3966,258 @@
           </p:nvSpPr>
           <p:spPr>
             <a:xfrm>
-              <a:off x="2477759" y="2073503"/>
-              <a:ext cx="5784919" cy="3091358"/>
+              <a:off x="2475100" y="2073503"/>
+              <a:ext cx="5787578" cy="3090527"/>
             </a:xfrm>
             <a:custGeom>
               <a:avLst/>
               <a:pathLst>
-                <a:path w="5784919" h="3091358">
+                <a:path w="5787578" h="3090527">
                   <a:moveTo>
                     <a:pt x="0" y="0"/>
                   </a:moveTo>
                   <a:lnTo>
-                    <a:pt x="55117" y="147796"/>
-                  </a:lnTo>
-                  <a:lnTo>
-                    <a:pt x="126739" y="329396"/>
-                  </a:lnTo>
-                  <a:lnTo>
-                    <a:pt x="198362" y="501110"/>
-                  </a:lnTo>
-                  <a:lnTo>
-                    <a:pt x="269985" y="663477"/>
-                  </a:lnTo>
-                  <a:lnTo>
-                    <a:pt x="341607" y="817005"/>
-                  </a:lnTo>
-                  <a:lnTo>
-                    <a:pt x="413230" y="962175"/>
-                  </a:lnTo>
-                  <a:lnTo>
-                    <a:pt x="484852" y="1099442"/>
-                  </a:lnTo>
-                  <a:lnTo>
-                    <a:pt x="556475" y="1229237"/>
-                  </a:lnTo>
-                  <a:lnTo>
-                    <a:pt x="628097" y="1351967"/>
-                  </a:lnTo>
-                  <a:lnTo>
-                    <a:pt x="699720" y="1468015"/>
-                  </a:lnTo>
-                  <a:lnTo>
-                    <a:pt x="771342" y="1577746"/>
-                  </a:lnTo>
-                  <a:lnTo>
-                    <a:pt x="842965" y="1681503"/>
-                  </a:lnTo>
-                  <a:lnTo>
-                    <a:pt x="914587" y="1779612"/>
-                  </a:lnTo>
-                  <a:lnTo>
-                    <a:pt x="986210" y="1872381"/>
-                  </a:lnTo>
-                  <a:lnTo>
-                    <a:pt x="1057832" y="1960099"/>
-                  </a:lnTo>
-                  <a:lnTo>
-                    <a:pt x="1129455" y="2043042"/>
-                  </a:lnTo>
-                  <a:lnTo>
-                    <a:pt x="1201077" y="2121470"/>
-                  </a:lnTo>
-                  <a:lnTo>
-                    <a:pt x="1272700" y="2195629"/>
-                  </a:lnTo>
-                  <a:lnTo>
-                    <a:pt x="1344322" y="2265750"/>
-                  </a:lnTo>
-                  <a:lnTo>
-                    <a:pt x="1415945" y="2332055"/>
-                  </a:lnTo>
-                  <a:lnTo>
-                    <a:pt x="1487567" y="2394750"/>
-                  </a:lnTo>
-                  <a:lnTo>
-                    <a:pt x="1559190" y="2454032"/>
-                  </a:lnTo>
-                  <a:lnTo>
-                    <a:pt x="1630813" y="2510087"/>
-                  </a:lnTo>
-                  <a:lnTo>
-                    <a:pt x="1702435" y="2563090"/>
-                  </a:lnTo>
-                  <a:lnTo>
-                    <a:pt x="1774058" y="2613208"/>
-                  </a:lnTo>
-                  <a:lnTo>
-                    <a:pt x="1845680" y="2655819"/>
-                  </a:lnTo>
-                  <a:lnTo>
-                    <a:pt x="1917303" y="2666983"/>
-                  </a:lnTo>
-                  <a:lnTo>
-                    <a:pt x="1988925" y="2677996"/>
-                  </a:lnTo>
-                  <a:lnTo>
-                    <a:pt x="2060548" y="2688861"/>
-                  </a:lnTo>
-                  <a:lnTo>
-                    <a:pt x="2132170" y="2699579"/>
-                  </a:lnTo>
-                  <a:lnTo>
-                    <a:pt x="2203793" y="2710153"/>
-                  </a:lnTo>
-                  <a:lnTo>
-                    <a:pt x="2275415" y="2720584"/>
-                  </a:lnTo>
-                  <a:lnTo>
-                    <a:pt x="2347038" y="2730875"/>
-                  </a:lnTo>
-                  <a:lnTo>
-                    <a:pt x="2418660" y="2741027"/>
-                  </a:lnTo>
-                  <a:lnTo>
-                    <a:pt x="2490283" y="2751042"/>
-                  </a:lnTo>
-                  <a:lnTo>
-                    <a:pt x="2561905" y="2760922"/>
-                  </a:lnTo>
-                  <a:lnTo>
-                    <a:pt x="2633528" y="2770668"/>
-                  </a:lnTo>
-                  <a:lnTo>
-                    <a:pt x="2705150" y="2780284"/>
-                  </a:lnTo>
-                  <a:lnTo>
-                    <a:pt x="2776773" y="2789769"/>
-                  </a:lnTo>
-                  <a:lnTo>
-                    <a:pt x="2848395" y="2799127"/>
-                  </a:lnTo>
-                  <a:lnTo>
-                    <a:pt x="2920018" y="2808358"/>
-                  </a:lnTo>
-                  <a:lnTo>
-                    <a:pt x="2991641" y="2817465"/>
-                  </a:lnTo>
-                  <a:lnTo>
-                    <a:pt x="3063263" y="2826450"/>
-                  </a:lnTo>
-                  <a:lnTo>
-                    <a:pt x="3134886" y="2835313"/>
-                  </a:lnTo>
-                  <a:lnTo>
-                    <a:pt x="3206508" y="2844056"/>
-                  </a:lnTo>
-                  <a:lnTo>
-                    <a:pt x="3278131" y="2852682"/>
-                  </a:lnTo>
-                  <a:lnTo>
-                    <a:pt x="3349753" y="2861191"/>
-                  </a:lnTo>
-                  <a:lnTo>
-                    <a:pt x="3421376" y="2869586"/>
-                  </a:lnTo>
-                  <a:lnTo>
-                    <a:pt x="3492998" y="2877867"/>
-                  </a:lnTo>
-                  <a:lnTo>
-                    <a:pt x="3564621" y="2886037"/>
-                  </a:lnTo>
-                  <a:lnTo>
-                    <a:pt x="3636243" y="2894097"/>
-                  </a:lnTo>
-                  <a:lnTo>
-                    <a:pt x="3707866" y="2902048"/>
-                  </a:lnTo>
-                  <a:lnTo>
-                    <a:pt x="3779488" y="2909891"/>
-                  </a:lnTo>
-                  <a:lnTo>
-                    <a:pt x="3851111" y="2917629"/>
-                  </a:lnTo>
-                  <a:lnTo>
-                    <a:pt x="3922733" y="2925263"/>
-                  </a:lnTo>
-                  <a:lnTo>
-                    <a:pt x="3994356" y="2932793"/>
-                  </a:lnTo>
-                  <a:lnTo>
-                    <a:pt x="4065978" y="2940223"/>
-                  </a:lnTo>
-                  <a:lnTo>
-                    <a:pt x="4137601" y="2947552"/>
-                  </a:lnTo>
-                  <a:lnTo>
-                    <a:pt x="4209223" y="2954782"/>
-                  </a:lnTo>
-                  <a:lnTo>
-                    <a:pt x="4280846" y="2961914"/>
-                  </a:lnTo>
-                  <a:lnTo>
-                    <a:pt x="4352468" y="2968951"/>
-                  </a:lnTo>
-                  <a:lnTo>
-                    <a:pt x="4424091" y="2975892"/>
-                  </a:lnTo>
-                  <a:lnTo>
-                    <a:pt x="4495714" y="2982740"/>
-                  </a:lnTo>
-                  <a:lnTo>
-                    <a:pt x="4567336" y="2989496"/>
-                  </a:lnTo>
-                  <a:lnTo>
-                    <a:pt x="4638959" y="2996161"/>
-                  </a:lnTo>
-                  <a:lnTo>
-                    <a:pt x="4710581" y="3002735"/>
-                  </a:lnTo>
-                  <a:lnTo>
-                    <a:pt x="4782204" y="3009221"/>
-                  </a:lnTo>
-                  <a:lnTo>
-                    <a:pt x="4853826" y="3015620"/>
-                  </a:lnTo>
-                  <a:lnTo>
-                    <a:pt x="4925449" y="3021932"/>
-                  </a:lnTo>
-                  <a:lnTo>
-                    <a:pt x="4997071" y="3028159"/>
-                  </a:lnTo>
-                  <a:lnTo>
-                    <a:pt x="5068694" y="3034302"/>
-                  </a:lnTo>
-                  <a:lnTo>
-                    <a:pt x="5140316" y="3040363"/>
-                  </a:lnTo>
-                  <a:lnTo>
-                    <a:pt x="5211939" y="3046341"/>
-                  </a:lnTo>
-                  <a:lnTo>
-                    <a:pt x="5283561" y="3052239"/>
-                  </a:lnTo>
-                  <a:lnTo>
-                    <a:pt x="5355184" y="3058058"/>
-                  </a:lnTo>
-                  <a:lnTo>
-                    <a:pt x="5426806" y="3063798"/>
-                  </a:lnTo>
-                  <a:lnTo>
-                    <a:pt x="5498429" y="3069461"/>
-                  </a:lnTo>
-                  <a:lnTo>
-                    <a:pt x="5570051" y="3075047"/>
-                  </a:lnTo>
-                  <a:lnTo>
-                    <a:pt x="5641674" y="3080558"/>
-                  </a:lnTo>
-                  <a:lnTo>
-                    <a:pt x="5713296" y="3085995"/>
-                  </a:lnTo>
-                  <a:lnTo>
-                    <a:pt x="5784919" y="3091358"/>
+                    <a:pt x="57776" y="154394"/>
+                  </a:lnTo>
+                  <a:lnTo>
+                    <a:pt x="129399" y="335384"/>
+                  </a:lnTo>
+                  <a:lnTo>
+                    <a:pt x="201021" y="506535"/>
+                  </a:lnTo>
+                  <a:lnTo>
+                    <a:pt x="272644" y="668383"/>
+                  </a:lnTo>
+                  <a:lnTo>
+                    <a:pt x="344266" y="821431"/>
+                  </a:lnTo>
+                  <a:lnTo>
+                    <a:pt x="415889" y="966160"/>
+                  </a:lnTo>
+                  <a:lnTo>
+                    <a:pt x="487511" y="1103021"/>
+                  </a:lnTo>
+                  <a:lnTo>
+                    <a:pt x="559134" y="1232442"/>
+                  </a:lnTo>
+                  <a:lnTo>
+                    <a:pt x="630756" y="1354827"/>
+                  </a:lnTo>
+                  <a:lnTo>
+                    <a:pt x="702379" y="1470559"/>
+                  </a:lnTo>
+                  <a:lnTo>
+                    <a:pt x="774001" y="1580000"/>
+                  </a:lnTo>
+                  <a:lnTo>
+                    <a:pt x="845624" y="1683492"/>
+                  </a:lnTo>
+                  <a:lnTo>
+                    <a:pt x="917246" y="1781357"/>
+                  </a:lnTo>
+                  <a:lnTo>
+                    <a:pt x="988869" y="1873902"/>
+                  </a:lnTo>
+                  <a:lnTo>
+                    <a:pt x="1060491" y="1961416"/>
+                  </a:lnTo>
+                  <a:lnTo>
+                    <a:pt x="1132114" y="2044173"/>
+                  </a:lnTo>
+                  <a:lnTo>
+                    <a:pt x="1203737" y="2122431"/>
+                  </a:lnTo>
+                  <a:lnTo>
+                    <a:pt x="1275359" y="2196435"/>
+                  </a:lnTo>
+                  <a:lnTo>
+                    <a:pt x="1346982" y="2266416"/>
+                  </a:lnTo>
+                  <a:lnTo>
+                    <a:pt x="1418604" y="2332592"/>
+                  </a:lnTo>
+                  <a:lnTo>
+                    <a:pt x="1490227" y="2395171"/>
+                  </a:lnTo>
+                  <a:lnTo>
+                    <a:pt x="1561849" y="2454348"/>
+                  </a:lnTo>
+                  <a:lnTo>
+                    <a:pt x="1633472" y="2510309"/>
+                  </a:lnTo>
+                  <a:lnTo>
+                    <a:pt x="1705094" y="2563227"/>
+                  </a:lnTo>
+                  <a:lnTo>
+                    <a:pt x="1776717" y="2613268"/>
+                  </a:lnTo>
+                  <a:lnTo>
+                    <a:pt x="1848339" y="2655815"/>
+                  </a:lnTo>
+                  <a:lnTo>
+                    <a:pt x="1919962" y="2666947"/>
+                  </a:lnTo>
+                  <a:lnTo>
+                    <a:pt x="1991584" y="2677930"/>
+                  </a:lnTo>
+                  <a:lnTo>
+                    <a:pt x="2063207" y="2688765"/>
+                  </a:lnTo>
+                  <a:lnTo>
+                    <a:pt x="2134829" y="2699455"/>
+                  </a:lnTo>
+                  <a:lnTo>
+                    <a:pt x="2206452" y="2710001"/>
+                  </a:lnTo>
+                  <a:lnTo>
+                    <a:pt x="2278074" y="2720405"/>
+                  </a:lnTo>
+                  <a:lnTo>
+                    <a:pt x="2349697" y="2730669"/>
+                  </a:lnTo>
+                  <a:lnTo>
+                    <a:pt x="2421319" y="2740795"/>
+                  </a:lnTo>
+                  <a:lnTo>
+                    <a:pt x="2492942" y="2750785"/>
+                  </a:lnTo>
+                  <a:lnTo>
+                    <a:pt x="2564565" y="2760641"/>
+                  </a:lnTo>
+                  <a:lnTo>
+                    <a:pt x="2636187" y="2770364"/>
+                  </a:lnTo>
+                  <a:lnTo>
+                    <a:pt x="2707810" y="2779956"/>
+                  </a:lnTo>
+                  <a:lnTo>
+                    <a:pt x="2779432" y="2789419"/>
+                  </a:lnTo>
+                  <a:lnTo>
+                    <a:pt x="2851055" y="2798756"/>
+                  </a:lnTo>
+                  <a:lnTo>
+                    <a:pt x="2922677" y="2807966"/>
+                  </a:lnTo>
+                  <a:lnTo>
+                    <a:pt x="2994300" y="2817053"/>
+                  </a:lnTo>
+                  <a:lnTo>
+                    <a:pt x="3065922" y="2826017"/>
+                  </a:lnTo>
+                  <a:lnTo>
+                    <a:pt x="3137545" y="2834861"/>
+                  </a:lnTo>
+                  <a:lnTo>
+                    <a:pt x="3209167" y="2843587"/>
+                  </a:lnTo>
+                  <a:lnTo>
+                    <a:pt x="3280790" y="2852194"/>
+                  </a:lnTo>
+                  <a:lnTo>
+                    <a:pt x="3352412" y="2860686"/>
+                  </a:lnTo>
+                  <a:lnTo>
+                    <a:pt x="3424035" y="2869064"/>
+                  </a:lnTo>
+                  <a:lnTo>
+                    <a:pt x="3495657" y="2877329"/>
+                  </a:lnTo>
+                  <a:lnTo>
+                    <a:pt x="3567280" y="2885484"/>
+                  </a:lnTo>
+                  <a:lnTo>
+                    <a:pt x="3638902" y="2893528"/>
+                  </a:lnTo>
+                  <a:lnTo>
+                    <a:pt x="3710525" y="2901464"/>
+                  </a:lnTo>
+                  <a:lnTo>
+                    <a:pt x="3782147" y="2909294"/>
+                  </a:lnTo>
+                  <a:lnTo>
+                    <a:pt x="3853770" y="2917018"/>
+                  </a:lnTo>
+                  <a:lnTo>
+                    <a:pt x="3925393" y="2924638"/>
+                  </a:lnTo>
+                  <a:lnTo>
+                    <a:pt x="3997015" y="2932156"/>
+                  </a:lnTo>
+                  <a:lnTo>
+                    <a:pt x="4068638" y="2939573"/>
+                  </a:lnTo>
+                  <a:lnTo>
+                    <a:pt x="4140260" y="2946890"/>
+                  </a:lnTo>
+                  <a:lnTo>
+                    <a:pt x="4211883" y="2954109"/>
+                  </a:lnTo>
+                  <a:lnTo>
+                    <a:pt x="4283505" y="2961231"/>
+                  </a:lnTo>
+                  <a:lnTo>
+                    <a:pt x="4355128" y="2968257"/>
+                  </a:lnTo>
+                  <a:lnTo>
+                    <a:pt x="4426750" y="2975188"/>
+                  </a:lnTo>
+                  <a:lnTo>
+                    <a:pt x="4498373" y="2982026"/>
+                  </a:lnTo>
+                  <a:lnTo>
+                    <a:pt x="4569995" y="2988773"/>
+                  </a:lnTo>
+                  <a:lnTo>
+                    <a:pt x="4641618" y="2995428"/>
+                  </a:lnTo>
+                  <a:lnTo>
+                    <a:pt x="4713240" y="3001994"/>
+                  </a:lnTo>
+                  <a:lnTo>
+                    <a:pt x="4784863" y="3008472"/>
+                  </a:lnTo>
+                  <a:lnTo>
+                    <a:pt x="4856485" y="3014863"/>
+                  </a:lnTo>
+                  <a:lnTo>
+                    <a:pt x="4928108" y="3021167"/>
+                  </a:lnTo>
+                  <a:lnTo>
+                    <a:pt x="4999730" y="3027387"/>
+                  </a:lnTo>
+                  <a:lnTo>
+                    <a:pt x="5071353" y="3033524"/>
+                  </a:lnTo>
+                  <a:lnTo>
+                    <a:pt x="5142975" y="3039578"/>
+                  </a:lnTo>
+                  <a:lnTo>
+                    <a:pt x="5214598" y="3045550"/>
+                  </a:lnTo>
+                  <a:lnTo>
+                    <a:pt x="5286221" y="3051442"/>
+                  </a:lnTo>
+                  <a:lnTo>
+                    <a:pt x="5357843" y="3057255"/>
+                  </a:lnTo>
+                  <a:lnTo>
+                    <a:pt x="5429466" y="3062990"/>
+                  </a:lnTo>
+                  <a:lnTo>
+                    <a:pt x="5501088" y="3068647"/>
+                  </a:lnTo>
+                  <a:lnTo>
+                    <a:pt x="5572711" y="3074229"/>
+                  </a:lnTo>
+                  <a:lnTo>
+                    <a:pt x="5644333" y="3079735"/>
+                  </a:lnTo>
+                  <a:lnTo>
+                    <a:pt x="5715956" y="3085168"/>
+                  </a:lnTo>
+                  <a:lnTo>
+                    <a:pt x="5787578" y="3090527"/>
                   </a:lnTo>
                 </a:path>
               </a:pathLst>
@@ -4237,309 +4237,309 @@
           </p:nvSpPr>
           <p:spPr>
             <a:xfrm>
-              <a:off x="1172049" y="4052677"/>
-              <a:ext cx="7090630" cy="1466689"/>
+              <a:off x="1172049" y="4055205"/>
+              <a:ext cx="7090630" cy="1463993"/>
             </a:xfrm>
             <a:custGeom>
               <a:avLst/>
               <a:pathLst>
-                <a:path w="7090630" h="1466689">
+                <a:path w="7090630" h="1463993">
                   <a:moveTo>
-                    <a:pt x="7090630" y="1466689"/>
+                    <a:pt x="7090630" y="1463993"/>
                   </a:moveTo>
                   <a:lnTo>
-                    <a:pt x="7019007" y="1464508"/>
-                  </a:lnTo>
-                  <a:lnTo>
-                    <a:pt x="6947385" y="1462201"/>
-                  </a:lnTo>
-                  <a:lnTo>
-                    <a:pt x="6875762" y="1459762"/>
-                  </a:lnTo>
-                  <a:lnTo>
-                    <a:pt x="6804139" y="1457182"/>
-                  </a:lnTo>
-                  <a:lnTo>
-                    <a:pt x="6732517" y="1454454"/>
-                  </a:lnTo>
-                  <a:lnTo>
-                    <a:pt x="6660894" y="1451569"/>
-                  </a:lnTo>
-                  <a:lnTo>
-                    <a:pt x="6589272" y="1448517"/>
-                  </a:lnTo>
-                  <a:lnTo>
-                    <a:pt x="6517649" y="1445290"/>
-                  </a:lnTo>
-                  <a:lnTo>
-                    <a:pt x="6446027" y="1441877"/>
-                  </a:lnTo>
-                  <a:lnTo>
-                    <a:pt x="6374404" y="1438268"/>
-                  </a:lnTo>
-                  <a:lnTo>
-                    <a:pt x="6302782" y="1434450"/>
-                  </a:lnTo>
-                  <a:lnTo>
-                    <a:pt x="6231159" y="1430413"/>
-                  </a:lnTo>
-                  <a:lnTo>
-                    <a:pt x="6159537" y="1426144"/>
-                  </a:lnTo>
-                  <a:lnTo>
-                    <a:pt x="6087914" y="1421629"/>
-                  </a:lnTo>
-                  <a:lnTo>
-                    <a:pt x="6016292" y="1416853"/>
-                  </a:lnTo>
-                  <a:lnTo>
-                    <a:pt x="5944669" y="1411803"/>
-                  </a:lnTo>
-                  <a:lnTo>
-                    <a:pt x="5873047" y="1406463"/>
-                  </a:lnTo>
-                  <a:lnTo>
-                    <a:pt x="5801424" y="1400814"/>
-                  </a:lnTo>
-                  <a:lnTo>
-                    <a:pt x="5729802" y="1394841"/>
-                  </a:lnTo>
-                  <a:lnTo>
-                    <a:pt x="5658179" y="1388523"/>
-                  </a:lnTo>
-                  <a:lnTo>
-                    <a:pt x="5586557" y="1381842"/>
-                  </a:lnTo>
-                  <a:lnTo>
-                    <a:pt x="5514934" y="1374777"/>
-                  </a:lnTo>
-                  <a:lnTo>
-                    <a:pt x="5443311" y="1367304"/>
-                  </a:lnTo>
-                  <a:lnTo>
-                    <a:pt x="5371689" y="1359401"/>
-                  </a:lnTo>
-                  <a:lnTo>
-                    <a:pt x="5300066" y="1351044"/>
-                  </a:lnTo>
-                  <a:lnTo>
-                    <a:pt x="5228444" y="1342205"/>
-                  </a:lnTo>
-                  <a:lnTo>
-                    <a:pt x="5156821" y="1332857"/>
-                  </a:lnTo>
-                  <a:lnTo>
-                    <a:pt x="5085199" y="1322971"/>
-                  </a:lnTo>
-                  <a:lnTo>
-                    <a:pt x="5013576" y="1312516"/>
-                  </a:lnTo>
-                  <a:lnTo>
-                    <a:pt x="4941954" y="1301460"/>
-                  </a:lnTo>
-                  <a:lnTo>
-                    <a:pt x="4870331" y="1289766"/>
-                  </a:lnTo>
-                  <a:lnTo>
-                    <a:pt x="4798709" y="1277399"/>
-                  </a:lnTo>
-                  <a:lnTo>
-                    <a:pt x="4727086" y="1264321"/>
-                  </a:lnTo>
-                  <a:lnTo>
-                    <a:pt x="4655464" y="1250489"/>
-                  </a:lnTo>
-                  <a:lnTo>
-                    <a:pt x="4583841" y="1235861"/>
-                  </a:lnTo>
-                  <a:lnTo>
-                    <a:pt x="4512219" y="1220391"/>
-                  </a:lnTo>
-                  <a:lnTo>
-                    <a:pt x="4440596" y="1204031"/>
-                  </a:lnTo>
-                  <a:lnTo>
-                    <a:pt x="4368974" y="1186728"/>
-                  </a:lnTo>
-                  <a:lnTo>
-                    <a:pt x="4297351" y="1168429"/>
-                  </a:lnTo>
-                  <a:lnTo>
-                    <a:pt x="4225729" y="1149077"/>
-                  </a:lnTo>
-                  <a:lnTo>
-                    <a:pt x="4154106" y="1128611"/>
-                  </a:lnTo>
-                  <a:lnTo>
-                    <a:pt x="4082483" y="1106966"/>
-                  </a:lnTo>
-                  <a:lnTo>
-                    <a:pt x="4010861" y="1084076"/>
-                  </a:lnTo>
-                  <a:lnTo>
-                    <a:pt x="3939238" y="1059867"/>
-                  </a:lnTo>
-                  <a:lnTo>
-                    <a:pt x="3867616" y="1034265"/>
-                  </a:lnTo>
-                  <a:lnTo>
-                    <a:pt x="3795993" y="1007189"/>
-                  </a:lnTo>
-                  <a:lnTo>
-                    <a:pt x="3724371" y="978554"/>
-                  </a:lnTo>
-                  <a:lnTo>
-                    <a:pt x="3652748" y="948270"/>
-                  </a:lnTo>
-                  <a:lnTo>
-                    <a:pt x="3581126" y="916243"/>
-                  </a:lnTo>
-                  <a:lnTo>
-                    <a:pt x="3509503" y="882372"/>
-                  </a:lnTo>
-                  <a:lnTo>
-                    <a:pt x="3437881" y="846551"/>
-                  </a:lnTo>
-                  <a:lnTo>
-                    <a:pt x="3366258" y="808668"/>
-                  </a:lnTo>
-                  <a:lnTo>
-                    <a:pt x="3294636" y="768604"/>
-                  </a:lnTo>
-                  <a:lnTo>
-                    <a:pt x="3223013" y="726233"/>
-                  </a:lnTo>
-                  <a:lnTo>
-                    <a:pt x="3151391" y="681423"/>
-                  </a:lnTo>
-                  <a:lnTo>
-                    <a:pt x="3079768" y="665328"/>
-                  </a:lnTo>
-                  <a:lnTo>
-                    <a:pt x="3008146" y="653857"/>
-                  </a:lnTo>
-                  <a:lnTo>
-                    <a:pt x="2936523" y="642229"/>
-                  </a:lnTo>
-                  <a:lnTo>
-                    <a:pt x="2864901" y="630442"/>
-                  </a:lnTo>
-                  <a:lnTo>
-                    <a:pt x="2793278" y="618494"/>
-                  </a:lnTo>
-                  <a:lnTo>
-                    <a:pt x="2721655" y="606383"/>
-                  </a:lnTo>
-                  <a:lnTo>
-                    <a:pt x="2650033" y="594106"/>
-                  </a:lnTo>
-                  <a:lnTo>
-                    <a:pt x="2578410" y="581661"/>
-                  </a:lnTo>
-                  <a:lnTo>
-                    <a:pt x="2506788" y="569047"/>
-                  </a:lnTo>
-                  <a:lnTo>
-                    <a:pt x="2435165" y="556259"/>
-                  </a:lnTo>
-                  <a:lnTo>
-                    <a:pt x="2363543" y="543297"/>
-                  </a:lnTo>
-                  <a:lnTo>
-                    <a:pt x="2291920" y="530158"/>
-                  </a:lnTo>
-                  <a:lnTo>
-                    <a:pt x="2220298" y="516840"/>
-                  </a:lnTo>
-                  <a:lnTo>
-                    <a:pt x="2148675" y="503339"/>
-                  </a:lnTo>
-                  <a:lnTo>
-                    <a:pt x="2077053" y="489653"/>
-                  </a:lnTo>
-                  <a:lnTo>
-                    <a:pt x="2005430" y="475781"/>
-                  </a:lnTo>
-                  <a:lnTo>
-                    <a:pt x="1933808" y="461719"/>
-                  </a:lnTo>
-                  <a:lnTo>
-                    <a:pt x="1862185" y="447465"/>
-                  </a:lnTo>
-                  <a:lnTo>
-                    <a:pt x="1790563" y="433016"/>
-                  </a:lnTo>
-                  <a:lnTo>
-                    <a:pt x="1718940" y="418369"/>
-                  </a:lnTo>
-                  <a:lnTo>
-                    <a:pt x="1647318" y="403523"/>
-                  </a:lnTo>
-                  <a:lnTo>
-                    <a:pt x="1575695" y="388473"/>
-                  </a:lnTo>
-                  <a:lnTo>
-                    <a:pt x="1504073" y="373218"/>
-                  </a:lnTo>
-                  <a:lnTo>
-                    <a:pt x="1432450" y="357754"/>
-                  </a:lnTo>
-                  <a:lnTo>
-                    <a:pt x="1360827" y="342079"/>
-                  </a:lnTo>
-                  <a:lnTo>
-                    <a:pt x="1289205" y="326189"/>
-                  </a:lnTo>
-                  <a:lnTo>
-                    <a:pt x="1217582" y="310083"/>
-                  </a:lnTo>
-                  <a:lnTo>
-                    <a:pt x="1145960" y="293756"/>
-                  </a:lnTo>
-                  <a:lnTo>
-                    <a:pt x="1074337" y="277206"/>
-                  </a:lnTo>
-                  <a:lnTo>
-                    <a:pt x="1002715" y="260430"/>
-                  </a:lnTo>
-                  <a:lnTo>
-                    <a:pt x="931092" y="243424"/>
-                  </a:lnTo>
-                  <a:lnTo>
-                    <a:pt x="859470" y="226186"/>
-                  </a:lnTo>
-                  <a:lnTo>
-                    <a:pt x="787847" y="208713"/>
-                  </a:lnTo>
-                  <a:lnTo>
-                    <a:pt x="716225" y="191000"/>
-                  </a:lnTo>
-                  <a:lnTo>
-                    <a:pt x="644602" y="173046"/>
-                  </a:lnTo>
-                  <a:lnTo>
-                    <a:pt x="572980" y="154846"/>
-                  </a:lnTo>
-                  <a:lnTo>
-                    <a:pt x="501357" y="136397"/>
-                  </a:lnTo>
-                  <a:lnTo>
-                    <a:pt x="429735" y="117696"/>
-                  </a:lnTo>
-                  <a:lnTo>
-                    <a:pt x="358112" y="98740"/>
-                  </a:lnTo>
-                  <a:lnTo>
-                    <a:pt x="286490" y="79524"/>
-                  </a:lnTo>
-                  <a:lnTo>
-                    <a:pt x="214867" y="60046"/>
-                  </a:lnTo>
-                  <a:lnTo>
-                    <a:pt x="143245" y="40302"/>
-                  </a:lnTo>
-                  <a:lnTo>
-                    <a:pt x="71622" y="20287"/>
+                    <a:pt x="7019007" y="1461806"/>
+                  </a:lnTo>
+                  <a:lnTo>
+                    <a:pt x="6947385" y="1459493"/>
+                  </a:lnTo>
+                  <a:lnTo>
+                    <a:pt x="6875762" y="1457047"/>
+                  </a:lnTo>
+                  <a:lnTo>
+                    <a:pt x="6804139" y="1454460"/>
+                  </a:lnTo>
+                  <a:lnTo>
+                    <a:pt x="6732517" y="1451725"/>
+                  </a:lnTo>
+                  <a:lnTo>
+                    <a:pt x="6660894" y="1448832"/>
+                  </a:lnTo>
+                  <a:lnTo>
+                    <a:pt x="6589272" y="1445773"/>
+                  </a:lnTo>
+                  <a:lnTo>
+                    <a:pt x="6517649" y="1442538"/>
+                  </a:lnTo>
+                  <a:lnTo>
+                    <a:pt x="6446027" y="1439117"/>
+                  </a:lnTo>
+                  <a:lnTo>
+                    <a:pt x="6374404" y="1435500"/>
+                  </a:lnTo>
+                  <a:lnTo>
+                    <a:pt x="6302782" y="1431675"/>
+                  </a:lnTo>
+                  <a:lnTo>
+                    <a:pt x="6231159" y="1427629"/>
+                  </a:lnTo>
+                  <a:lnTo>
+                    <a:pt x="6159537" y="1423352"/>
+                  </a:lnTo>
+                  <a:lnTo>
+                    <a:pt x="6087914" y="1418828"/>
+                  </a:lnTo>
+                  <a:lnTo>
+                    <a:pt x="6016292" y="1414044"/>
+                  </a:lnTo>
+                  <a:lnTo>
+                    <a:pt x="5944669" y="1408985"/>
+                  </a:lnTo>
+                  <a:lnTo>
+                    <a:pt x="5873047" y="1403635"/>
+                  </a:lnTo>
+                  <a:lnTo>
+                    <a:pt x="5801424" y="1397978"/>
+                  </a:lnTo>
+                  <a:lnTo>
+                    <a:pt x="5729802" y="1391996"/>
+                  </a:lnTo>
+                  <a:lnTo>
+                    <a:pt x="5658179" y="1385670"/>
+                  </a:lnTo>
+                  <a:lnTo>
+                    <a:pt x="5586557" y="1378980"/>
+                  </a:lnTo>
+                  <a:lnTo>
+                    <a:pt x="5514934" y="1371905"/>
+                  </a:lnTo>
+                  <a:lnTo>
+                    <a:pt x="5443311" y="1364424"/>
+                  </a:lnTo>
+                  <a:lnTo>
+                    <a:pt x="5371689" y="1356512"/>
+                  </a:lnTo>
+                  <a:lnTo>
+                    <a:pt x="5300066" y="1348146"/>
+                  </a:lnTo>
+                  <a:lnTo>
+                    <a:pt x="5228444" y="1339299"/>
+                  </a:lnTo>
+                  <a:lnTo>
+                    <a:pt x="5156821" y="1329943"/>
+                  </a:lnTo>
+                  <a:lnTo>
+                    <a:pt x="5085199" y="1320050"/>
+                  </a:lnTo>
+                  <a:lnTo>
+                    <a:pt x="5013576" y="1309588"/>
+                  </a:lnTo>
+                  <a:lnTo>
+                    <a:pt x="4941954" y="1298524"/>
+                  </a:lnTo>
+                  <a:lnTo>
+                    <a:pt x="4870331" y="1286824"/>
+                  </a:lnTo>
+                  <a:lnTo>
+                    <a:pt x="4798709" y="1274452"/>
+                  </a:lnTo>
+                  <a:lnTo>
+                    <a:pt x="4727086" y="1261368"/>
+                  </a:lnTo>
+                  <a:lnTo>
+                    <a:pt x="4655464" y="1247532"/>
+                  </a:lnTo>
+                  <a:lnTo>
+                    <a:pt x="4583841" y="1232901"/>
+                  </a:lnTo>
+                  <a:lnTo>
+                    <a:pt x="4512219" y="1217429"/>
+                  </a:lnTo>
+                  <a:lnTo>
+                    <a:pt x="4440596" y="1201068"/>
+                  </a:lnTo>
+                  <a:lnTo>
+                    <a:pt x="4368974" y="1183765"/>
+                  </a:lnTo>
+                  <a:lnTo>
+                    <a:pt x="4297351" y="1165468"/>
+                  </a:lnTo>
+                  <a:lnTo>
+                    <a:pt x="4225729" y="1146120"/>
+                  </a:lnTo>
+                  <a:lnTo>
+                    <a:pt x="4154106" y="1125659"/>
+                  </a:lnTo>
+                  <a:lnTo>
+                    <a:pt x="4082483" y="1104021"/>
+                  </a:lnTo>
+                  <a:lnTo>
+                    <a:pt x="4010861" y="1081140"/>
+                  </a:lnTo>
+                  <a:lnTo>
+                    <a:pt x="3939238" y="1056944"/>
+                  </a:lnTo>
+                  <a:lnTo>
+                    <a:pt x="3867616" y="1031356"/>
+                  </a:lnTo>
+                  <a:lnTo>
+                    <a:pt x="3795993" y="1004298"/>
+                  </a:lnTo>
+                  <a:lnTo>
+                    <a:pt x="3724371" y="975684"/>
+                  </a:lnTo>
+                  <a:lnTo>
+                    <a:pt x="3652748" y="945425"/>
+                  </a:lnTo>
+                  <a:lnTo>
+                    <a:pt x="3581126" y="913427"/>
+                  </a:lnTo>
+                  <a:lnTo>
+                    <a:pt x="3509503" y="879589"/>
+                  </a:lnTo>
+                  <a:lnTo>
+                    <a:pt x="3437881" y="843806"/>
+                  </a:lnTo>
+                  <a:lnTo>
+                    <a:pt x="3366258" y="805966"/>
+                  </a:lnTo>
+                  <a:lnTo>
+                    <a:pt x="3294636" y="765950"/>
+                  </a:lnTo>
+                  <a:lnTo>
+                    <a:pt x="3223013" y="723634"/>
+                  </a:lnTo>
+                  <a:lnTo>
+                    <a:pt x="3151391" y="678886"/>
+                  </a:lnTo>
+                  <a:lnTo>
+                    <a:pt x="3079768" y="662827"/>
+                  </a:lnTo>
+                  <a:lnTo>
+                    <a:pt x="3008146" y="651389"/>
+                  </a:lnTo>
+                  <a:lnTo>
+                    <a:pt x="2936523" y="639795"/>
+                  </a:lnTo>
+                  <a:lnTo>
+                    <a:pt x="2864901" y="628043"/>
+                  </a:lnTo>
+                  <a:lnTo>
+                    <a:pt x="2793278" y="616131"/>
+                  </a:lnTo>
+                  <a:lnTo>
+                    <a:pt x="2721655" y="604056"/>
+                  </a:lnTo>
+                  <a:lnTo>
+                    <a:pt x="2650033" y="591817"/>
+                  </a:lnTo>
+                  <a:lnTo>
+                    <a:pt x="2578410" y="579411"/>
+                  </a:lnTo>
+                  <a:lnTo>
+                    <a:pt x="2506788" y="566836"/>
+                  </a:lnTo>
+                  <a:lnTo>
+                    <a:pt x="2435165" y="554089"/>
+                  </a:lnTo>
+                  <a:lnTo>
+                    <a:pt x="2363543" y="541169"/>
+                  </a:lnTo>
+                  <a:lnTo>
+                    <a:pt x="2291920" y="528073"/>
+                  </a:lnTo>
+                  <a:lnTo>
+                    <a:pt x="2220298" y="514798"/>
+                  </a:lnTo>
+                  <a:lnTo>
+                    <a:pt x="2148675" y="501342"/>
+                  </a:lnTo>
+                  <a:lnTo>
+                    <a:pt x="2077053" y="487703"/>
+                  </a:lnTo>
+                  <a:lnTo>
+                    <a:pt x="2005430" y="473878"/>
+                  </a:lnTo>
+                  <a:lnTo>
+                    <a:pt x="1933808" y="459865"/>
+                  </a:lnTo>
+                  <a:lnTo>
+                    <a:pt x="1862185" y="445660"/>
+                  </a:lnTo>
+                  <a:lnTo>
+                    <a:pt x="1790563" y="431262"/>
+                  </a:lnTo>
+                  <a:lnTo>
+                    <a:pt x="1718940" y="416668"/>
+                  </a:lnTo>
+                  <a:lnTo>
+                    <a:pt x="1647318" y="401875"/>
+                  </a:lnTo>
+                  <a:lnTo>
+                    <a:pt x="1575695" y="386880"/>
+                  </a:lnTo>
+                  <a:lnTo>
+                    <a:pt x="1504073" y="371681"/>
+                  </a:lnTo>
+                  <a:lnTo>
+                    <a:pt x="1432450" y="356274"/>
+                  </a:lnTo>
+                  <a:lnTo>
+                    <a:pt x="1360827" y="340658"/>
+                  </a:lnTo>
+                  <a:lnTo>
+                    <a:pt x="1289205" y="324829"/>
+                  </a:lnTo>
+                  <a:lnTo>
+                    <a:pt x="1217582" y="308784"/>
+                  </a:lnTo>
+                  <a:lnTo>
+                    <a:pt x="1145960" y="292520"/>
+                  </a:lnTo>
+                  <a:lnTo>
+                    <a:pt x="1074337" y="276035"/>
+                  </a:lnTo>
+                  <a:lnTo>
+                    <a:pt x="1002715" y="259325"/>
+                  </a:lnTo>
+                  <a:lnTo>
+                    <a:pt x="931092" y="242387"/>
+                  </a:lnTo>
+                  <a:lnTo>
+                    <a:pt x="859470" y="225219"/>
+                  </a:lnTo>
+                  <a:lnTo>
+                    <a:pt x="787847" y="207816"/>
+                  </a:lnTo>
+                  <a:lnTo>
+                    <a:pt x="716225" y="190176"/>
+                  </a:lnTo>
+                  <a:lnTo>
+                    <a:pt x="644602" y="172296"/>
+                  </a:lnTo>
+                  <a:lnTo>
+                    <a:pt x="572980" y="154172"/>
+                  </a:lnTo>
+                  <a:lnTo>
+                    <a:pt x="501357" y="135801"/>
+                  </a:lnTo>
+                  <a:lnTo>
+                    <a:pt x="429735" y="117180"/>
+                  </a:lnTo>
+                  <a:lnTo>
+                    <a:pt x="358112" y="98305"/>
+                  </a:lnTo>
+                  <a:lnTo>
+                    <a:pt x="286490" y="79172"/>
+                  </a:lnTo>
+                  <a:lnTo>
+                    <a:pt x="214867" y="59779"/>
+                  </a:lnTo>
+                  <a:lnTo>
+                    <a:pt x="143245" y="40122"/>
+                  </a:lnTo>
+                  <a:lnTo>
+                    <a:pt x="71622" y="20196"/>
                   </a:lnTo>
                   <a:lnTo>
                     <a:pt x="0" y="0"/>
@@ -4562,306 +4562,306 @@
           </p:nvSpPr>
           <p:spPr>
             <a:xfrm>
-              <a:off x="1358302" y="2073503"/>
-              <a:ext cx="6904376" cy="3361824"/>
+              <a:off x="1353291" y="2073503"/>
+              <a:ext cx="6909388" cy="3361427"/>
             </a:xfrm>
             <a:custGeom>
               <a:avLst/>
               <a:pathLst>
-                <a:path w="6904376" h="3361824">
+                <a:path w="6909388" h="3361427">
                   <a:moveTo>
                     <a:pt x="0" y="0"/>
                   </a:moveTo>
                   <a:lnTo>
-                    <a:pt x="28614" y="48565"/>
-                  </a:lnTo>
-                  <a:lnTo>
-                    <a:pt x="100236" y="165972"/>
-                  </a:lnTo>
-                  <a:lnTo>
-                    <a:pt x="171859" y="279366"/>
-                  </a:lnTo>
-                  <a:lnTo>
-                    <a:pt x="243481" y="388884"/>
-                  </a:lnTo>
-                  <a:lnTo>
-                    <a:pt x="315104" y="494660"/>
-                  </a:lnTo>
-                  <a:lnTo>
-                    <a:pt x="386726" y="596820"/>
-                  </a:lnTo>
-                  <a:lnTo>
-                    <a:pt x="458349" y="695489"/>
-                  </a:lnTo>
-                  <a:lnTo>
-                    <a:pt x="529971" y="790785"/>
-                  </a:lnTo>
-                  <a:lnTo>
-                    <a:pt x="601594" y="882824"/>
-                  </a:lnTo>
-                  <a:lnTo>
-                    <a:pt x="673216" y="971718"/>
-                  </a:lnTo>
-                  <a:lnTo>
-                    <a:pt x="744839" y="1057573"/>
-                  </a:lnTo>
-                  <a:lnTo>
-                    <a:pt x="816461" y="1140494"/>
-                  </a:lnTo>
-                  <a:lnTo>
-                    <a:pt x="888084" y="1220581"/>
-                  </a:lnTo>
-                  <a:lnTo>
-                    <a:pt x="959707" y="1297931"/>
-                  </a:lnTo>
-                  <a:lnTo>
-                    <a:pt x="1031329" y="1372638"/>
-                  </a:lnTo>
-                  <a:lnTo>
-                    <a:pt x="1102952" y="1444790"/>
-                  </a:lnTo>
-                  <a:lnTo>
-                    <a:pt x="1174574" y="1514477"/>
-                  </a:lnTo>
-                  <a:lnTo>
-                    <a:pt x="1246197" y="1581783"/>
-                  </a:lnTo>
-                  <a:lnTo>
-                    <a:pt x="1317819" y="1646787"/>
-                  </a:lnTo>
-                  <a:lnTo>
-                    <a:pt x="1389442" y="1709570"/>
-                  </a:lnTo>
-                  <a:lnTo>
-                    <a:pt x="1461064" y="1770208"/>
-                  </a:lnTo>
-                  <a:lnTo>
-                    <a:pt x="1532687" y="1828773"/>
-                  </a:lnTo>
-                  <a:lnTo>
-                    <a:pt x="1604309" y="1885336"/>
-                  </a:lnTo>
-                  <a:lnTo>
-                    <a:pt x="1675932" y="1939966"/>
-                  </a:lnTo>
-                  <a:lnTo>
-                    <a:pt x="1747554" y="1992729"/>
-                  </a:lnTo>
-                  <a:lnTo>
-                    <a:pt x="1819177" y="2043689"/>
-                  </a:lnTo>
-                  <a:lnTo>
-                    <a:pt x="1890799" y="2092906"/>
-                  </a:lnTo>
-                  <a:lnTo>
-                    <a:pt x="1962422" y="2140442"/>
-                  </a:lnTo>
-                  <a:lnTo>
-                    <a:pt x="2034044" y="2186353"/>
-                  </a:lnTo>
-                  <a:lnTo>
-                    <a:pt x="2105667" y="2230695"/>
-                  </a:lnTo>
-                  <a:lnTo>
-                    <a:pt x="2177289" y="2273522"/>
-                  </a:lnTo>
-                  <a:lnTo>
-                    <a:pt x="2248912" y="2314884"/>
-                  </a:lnTo>
-                  <a:lnTo>
-                    <a:pt x="2320535" y="2354834"/>
-                  </a:lnTo>
-                  <a:lnTo>
-                    <a:pt x="2392157" y="2393417"/>
-                  </a:lnTo>
-                  <a:lnTo>
-                    <a:pt x="2463780" y="2430682"/>
-                  </a:lnTo>
-                  <a:lnTo>
-                    <a:pt x="2535402" y="2466674"/>
-                  </a:lnTo>
-                  <a:lnTo>
-                    <a:pt x="2607025" y="2501435"/>
-                  </a:lnTo>
-                  <a:lnTo>
-                    <a:pt x="2678647" y="2535008"/>
-                  </a:lnTo>
-                  <a:lnTo>
-                    <a:pt x="2750270" y="2567434"/>
-                  </a:lnTo>
-                  <a:lnTo>
-                    <a:pt x="2821892" y="2598751"/>
-                  </a:lnTo>
-                  <a:lnTo>
-                    <a:pt x="2893515" y="2628998"/>
-                  </a:lnTo>
-                  <a:lnTo>
-                    <a:pt x="2965137" y="2658212"/>
-                  </a:lnTo>
-                  <a:lnTo>
-                    <a:pt x="3036760" y="2686427"/>
-                  </a:lnTo>
-                  <a:lnTo>
-                    <a:pt x="3108382" y="2713677"/>
-                  </a:lnTo>
-                  <a:lnTo>
-                    <a:pt x="3180005" y="2739996"/>
-                  </a:lnTo>
-                  <a:lnTo>
-                    <a:pt x="3251627" y="2765416"/>
-                  </a:lnTo>
-                  <a:lnTo>
-                    <a:pt x="3323250" y="2789967"/>
-                  </a:lnTo>
-                  <a:lnTo>
-                    <a:pt x="3394872" y="2813679"/>
-                  </a:lnTo>
-                  <a:lnTo>
-                    <a:pt x="3466495" y="2836580"/>
-                  </a:lnTo>
-                  <a:lnTo>
-                    <a:pt x="3538117" y="2858699"/>
-                  </a:lnTo>
-                  <a:lnTo>
-                    <a:pt x="3609740" y="2880062"/>
-                  </a:lnTo>
-                  <a:lnTo>
-                    <a:pt x="3681363" y="2900694"/>
-                  </a:lnTo>
-                  <a:lnTo>
-                    <a:pt x="3752985" y="2920622"/>
-                  </a:lnTo>
-                  <a:lnTo>
-                    <a:pt x="3824608" y="2939868"/>
-                  </a:lnTo>
-                  <a:lnTo>
-                    <a:pt x="3896230" y="2958456"/>
-                  </a:lnTo>
-                  <a:lnTo>
-                    <a:pt x="3967853" y="2976410"/>
-                  </a:lnTo>
-                  <a:lnTo>
-                    <a:pt x="4039475" y="2993749"/>
-                  </a:lnTo>
-                  <a:lnTo>
-                    <a:pt x="4111098" y="3010496"/>
-                  </a:lnTo>
-                  <a:lnTo>
-                    <a:pt x="4182720" y="3026671"/>
-                  </a:lnTo>
-                  <a:lnTo>
-                    <a:pt x="4254343" y="3042293"/>
-                  </a:lnTo>
-                  <a:lnTo>
-                    <a:pt x="4325965" y="3057381"/>
-                  </a:lnTo>
-                  <a:lnTo>
-                    <a:pt x="4397588" y="3071953"/>
-                  </a:lnTo>
-                  <a:lnTo>
-                    <a:pt x="4469210" y="3086027"/>
-                  </a:lnTo>
-                  <a:lnTo>
-                    <a:pt x="4540833" y="3099620"/>
-                  </a:lnTo>
-                  <a:lnTo>
-                    <a:pt x="4612455" y="3112749"/>
-                  </a:lnTo>
-                  <a:lnTo>
-                    <a:pt x="4684078" y="3125429"/>
-                  </a:lnTo>
-                  <a:lnTo>
-                    <a:pt x="4755700" y="3137675"/>
-                  </a:lnTo>
-                  <a:lnTo>
-                    <a:pt x="4827323" y="3149503"/>
-                  </a:lnTo>
-                  <a:lnTo>
-                    <a:pt x="4898945" y="3160927"/>
-                  </a:lnTo>
-                  <a:lnTo>
-                    <a:pt x="4970568" y="3171960"/>
-                  </a:lnTo>
-                  <a:lnTo>
-                    <a:pt x="5042191" y="3182616"/>
-                  </a:lnTo>
-                  <a:lnTo>
-                    <a:pt x="5113813" y="3192908"/>
-                  </a:lnTo>
-                  <a:lnTo>
-                    <a:pt x="5185436" y="3202848"/>
-                  </a:lnTo>
-                  <a:lnTo>
-                    <a:pt x="5257058" y="3212449"/>
-                  </a:lnTo>
-                  <a:lnTo>
-                    <a:pt x="5328681" y="3221721"/>
-                  </a:lnTo>
-                  <a:lnTo>
-                    <a:pt x="5400303" y="3230677"/>
-                  </a:lnTo>
-                  <a:lnTo>
-                    <a:pt x="5471926" y="3239326"/>
-                  </a:lnTo>
-                  <a:lnTo>
-                    <a:pt x="5543548" y="3247680"/>
-                  </a:lnTo>
-                  <a:lnTo>
-                    <a:pt x="5615171" y="3255748"/>
-                  </a:lnTo>
-                  <a:lnTo>
-                    <a:pt x="5686793" y="3263540"/>
-                  </a:lnTo>
-                  <a:lnTo>
-                    <a:pt x="5758416" y="3271066"/>
-                  </a:lnTo>
-                  <a:lnTo>
-                    <a:pt x="5830038" y="3278335"/>
-                  </a:lnTo>
-                  <a:lnTo>
-                    <a:pt x="5901661" y="3285356"/>
-                  </a:lnTo>
-                  <a:lnTo>
-                    <a:pt x="5973283" y="3292136"/>
-                  </a:lnTo>
-                  <a:lnTo>
-                    <a:pt x="6044906" y="3298685"/>
-                  </a:lnTo>
-                  <a:lnTo>
-                    <a:pt x="6116528" y="3305010"/>
-                  </a:lnTo>
-                  <a:lnTo>
-                    <a:pt x="6188151" y="3311119"/>
-                  </a:lnTo>
-                  <a:lnTo>
-                    <a:pt x="6259773" y="3317019"/>
-                  </a:lnTo>
-                  <a:lnTo>
-                    <a:pt x="6331396" y="3322717"/>
-                  </a:lnTo>
-                  <a:lnTo>
-                    <a:pt x="6403019" y="3328221"/>
-                  </a:lnTo>
-                  <a:lnTo>
-                    <a:pt x="6474641" y="3333536"/>
-                  </a:lnTo>
-                  <a:lnTo>
-                    <a:pt x="6546264" y="3338670"/>
-                  </a:lnTo>
-                  <a:lnTo>
-                    <a:pt x="6617886" y="3343629"/>
-                  </a:lnTo>
-                  <a:lnTo>
-                    <a:pt x="6689509" y="3348418"/>
-                  </a:lnTo>
-                  <a:lnTo>
-                    <a:pt x="6761131" y="3353043"/>
-                  </a:lnTo>
-                  <a:lnTo>
-                    <a:pt x="6832754" y="3357510"/>
-                  </a:lnTo>
-                  <a:lnTo>
-                    <a:pt x="6904376" y="3361824"/>
+                    <a:pt x="33625" y="56835"/>
+                  </a:lnTo>
+                  <a:lnTo>
+                    <a:pt x="105248" y="173764"/>
+                  </a:lnTo>
+                  <a:lnTo>
+                    <a:pt x="176870" y="286703"/>
+                  </a:lnTo>
+                  <a:lnTo>
+                    <a:pt x="248493" y="395789"/>
+                  </a:lnTo>
+                  <a:lnTo>
+                    <a:pt x="320115" y="501152"/>
+                  </a:lnTo>
+                  <a:lnTo>
+                    <a:pt x="391738" y="602921"/>
+                  </a:lnTo>
+                  <a:lnTo>
+                    <a:pt x="463361" y="701217"/>
+                  </a:lnTo>
+                  <a:lnTo>
+                    <a:pt x="534983" y="796159"/>
+                  </a:lnTo>
+                  <a:lnTo>
+                    <a:pt x="606606" y="887861"/>
+                  </a:lnTo>
+                  <a:lnTo>
+                    <a:pt x="678228" y="976435"/>
+                  </a:lnTo>
+                  <a:lnTo>
+                    <a:pt x="749851" y="1061986"/>
+                  </a:lnTo>
+                  <a:lnTo>
+                    <a:pt x="821473" y="1144619"/>
+                  </a:lnTo>
+                  <a:lnTo>
+                    <a:pt x="893096" y="1224431"/>
+                  </a:lnTo>
+                  <a:lnTo>
+                    <a:pt x="964718" y="1301521"/>
+                  </a:lnTo>
+                  <a:lnTo>
+                    <a:pt x="1036341" y="1375980"/>
+                  </a:lnTo>
+                  <a:lnTo>
+                    <a:pt x="1107963" y="1447899"/>
+                  </a:lnTo>
+                  <a:lnTo>
+                    <a:pt x="1179586" y="1517363"/>
+                  </a:lnTo>
+                  <a:lnTo>
+                    <a:pt x="1251208" y="1584458"/>
+                  </a:lnTo>
+                  <a:lnTo>
+                    <a:pt x="1322831" y="1649263"/>
+                  </a:lnTo>
+                  <a:lnTo>
+                    <a:pt x="1394453" y="1711857"/>
+                  </a:lnTo>
+                  <a:lnTo>
+                    <a:pt x="1466076" y="1772315"/>
+                  </a:lnTo>
+                  <a:lnTo>
+                    <a:pt x="1537698" y="1830711"/>
+                  </a:lnTo>
+                  <a:lnTo>
+                    <a:pt x="1609321" y="1887114"/>
+                  </a:lnTo>
+                  <a:lnTo>
+                    <a:pt x="1680943" y="1941592"/>
+                  </a:lnTo>
+                  <a:lnTo>
+                    <a:pt x="1752566" y="1994211"/>
+                  </a:lnTo>
+                  <a:lnTo>
+                    <a:pt x="1824189" y="2045035"/>
+                  </a:lnTo>
+                  <a:lnTo>
+                    <a:pt x="1895811" y="2094125"/>
+                  </a:lnTo>
+                  <a:lnTo>
+                    <a:pt x="1967434" y="2141540"/>
+                  </a:lnTo>
+                  <a:lnTo>
+                    <a:pt x="2039056" y="2187337"/>
+                  </a:lnTo>
+                  <a:lnTo>
+                    <a:pt x="2110679" y="2231572"/>
+                  </a:lnTo>
+                  <a:lnTo>
+                    <a:pt x="2182301" y="2274297"/>
+                  </a:lnTo>
+                  <a:lnTo>
+                    <a:pt x="2253924" y="2315564"/>
+                  </a:lnTo>
+                  <a:lnTo>
+                    <a:pt x="2325546" y="2355424"/>
+                  </a:lnTo>
+                  <a:lnTo>
+                    <a:pt x="2397169" y="2393923"/>
+                  </a:lnTo>
+                  <a:lnTo>
+                    <a:pt x="2468791" y="2431108"/>
+                  </a:lnTo>
+                  <a:lnTo>
+                    <a:pt x="2540414" y="2467025"/>
+                  </a:lnTo>
+                  <a:lnTo>
+                    <a:pt x="2612036" y="2501717"/>
+                  </a:lnTo>
+                  <a:lnTo>
+                    <a:pt x="2683659" y="2535224"/>
+                  </a:lnTo>
+                  <a:lnTo>
+                    <a:pt x="2755281" y="2567589"/>
+                  </a:lnTo>
+                  <a:lnTo>
+                    <a:pt x="2826904" y="2598849"/>
+                  </a:lnTo>
+                  <a:lnTo>
+                    <a:pt x="2898526" y="2629042"/>
+                  </a:lnTo>
+                  <a:lnTo>
+                    <a:pt x="2970149" y="2658205"/>
+                  </a:lnTo>
+                  <a:lnTo>
+                    <a:pt x="3041771" y="2686373"/>
+                  </a:lnTo>
+                  <a:lnTo>
+                    <a:pt x="3113394" y="2713580"/>
+                  </a:lnTo>
+                  <a:lnTo>
+                    <a:pt x="3185017" y="2739859"/>
+                  </a:lnTo>
+                  <a:lnTo>
+                    <a:pt x="3256639" y="2765241"/>
+                  </a:lnTo>
+                  <a:lnTo>
+                    <a:pt x="3328262" y="2789757"/>
+                  </a:lnTo>
+                  <a:lnTo>
+                    <a:pt x="3399884" y="2813436"/>
+                  </a:lnTo>
+                  <a:lnTo>
+                    <a:pt x="3471507" y="2836308"/>
+                  </a:lnTo>
+                  <a:lnTo>
+                    <a:pt x="3543129" y="2858399"/>
+                  </a:lnTo>
+                  <a:lnTo>
+                    <a:pt x="3614752" y="2879736"/>
+                  </a:lnTo>
+                  <a:lnTo>
+                    <a:pt x="3686374" y="2900345"/>
+                  </a:lnTo>
+                  <a:lnTo>
+                    <a:pt x="3757997" y="2920252"/>
+                  </a:lnTo>
+                  <a:lnTo>
+                    <a:pt x="3829619" y="2939478"/>
+                  </a:lnTo>
+                  <a:lnTo>
+                    <a:pt x="3901242" y="2958049"/>
+                  </a:lnTo>
+                  <a:lnTo>
+                    <a:pt x="3972864" y="2975986"/>
+                  </a:lnTo>
+                  <a:lnTo>
+                    <a:pt x="4044487" y="2993312"/>
+                  </a:lnTo>
+                  <a:lnTo>
+                    <a:pt x="4116109" y="3010046"/>
+                  </a:lnTo>
+                  <a:lnTo>
+                    <a:pt x="4187732" y="3026209"/>
+                  </a:lnTo>
+                  <a:lnTo>
+                    <a:pt x="4259354" y="3041820"/>
+                  </a:lnTo>
+                  <a:lnTo>
+                    <a:pt x="4330977" y="3056899"/>
+                  </a:lnTo>
+                  <a:lnTo>
+                    <a:pt x="4402599" y="3071463"/>
+                  </a:lnTo>
+                  <a:lnTo>
+                    <a:pt x="4474222" y="3085531"/>
+                  </a:lnTo>
+                  <a:lnTo>
+                    <a:pt x="4545845" y="3099118"/>
+                  </a:lnTo>
+                  <a:lnTo>
+                    <a:pt x="4617467" y="3112242"/>
+                  </a:lnTo>
+                  <a:lnTo>
+                    <a:pt x="4689090" y="3124918"/>
+                  </a:lnTo>
+                  <a:lnTo>
+                    <a:pt x="4760712" y="3137162"/>
+                  </a:lnTo>
+                  <a:lnTo>
+                    <a:pt x="4832335" y="3148987"/>
+                  </a:lnTo>
+                  <a:lnTo>
+                    <a:pt x="4903957" y="3160410"/>
+                  </a:lnTo>
+                  <a:lnTo>
+                    <a:pt x="4975580" y="3171442"/>
+                  </a:lnTo>
+                  <a:lnTo>
+                    <a:pt x="5047202" y="3182098"/>
+                  </a:lnTo>
+                  <a:lnTo>
+                    <a:pt x="5118825" y="3192391"/>
+                  </a:lnTo>
+                  <a:lnTo>
+                    <a:pt x="5190447" y="3202332"/>
+                  </a:lnTo>
+                  <a:lnTo>
+                    <a:pt x="5262070" y="3211934"/>
+                  </a:lnTo>
+                  <a:lnTo>
+                    <a:pt x="5333692" y="3221208"/>
+                  </a:lnTo>
+                  <a:lnTo>
+                    <a:pt x="5405315" y="3230166"/>
+                  </a:lnTo>
+                  <a:lnTo>
+                    <a:pt x="5476937" y="3238819"/>
+                  </a:lnTo>
+                  <a:lnTo>
+                    <a:pt x="5548560" y="3247176"/>
+                  </a:lnTo>
+                  <a:lnTo>
+                    <a:pt x="5620182" y="3255248"/>
+                  </a:lnTo>
+                  <a:lnTo>
+                    <a:pt x="5691805" y="3263044"/>
+                  </a:lnTo>
+                  <a:lnTo>
+                    <a:pt x="5763427" y="3270575"/>
+                  </a:lnTo>
+                  <a:lnTo>
+                    <a:pt x="5835050" y="3277848"/>
+                  </a:lnTo>
+                  <a:lnTo>
+                    <a:pt x="5906672" y="3284874"/>
+                  </a:lnTo>
+                  <a:lnTo>
+                    <a:pt x="5978295" y="3291660"/>
+                  </a:lnTo>
+                  <a:lnTo>
+                    <a:pt x="6049918" y="3298214"/>
+                  </a:lnTo>
+                  <a:lnTo>
+                    <a:pt x="6121540" y="3304544"/>
+                  </a:lnTo>
+                  <a:lnTo>
+                    <a:pt x="6193163" y="3310659"/>
+                  </a:lnTo>
+                  <a:lnTo>
+                    <a:pt x="6264785" y="3316565"/>
+                  </a:lnTo>
+                  <a:lnTo>
+                    <a:pt x="6336408" y="3322269"/>
+                  </a:lnTo>
+                  <a:lnTo>
+                    <a:pt x="6408030" y="3327779"/>
+                  </a:lnTo>
+                  <a:lnTo>
+                    <a:pt x="6479653" y="3333100"/>
+                  </a:lnTo>
+                  <a:lnTo>
+                    <a:pt x="6551275" y="3338241"/>
+                  </a:lnTo>
+                  <a:lnTo>
+                    <a:pt x="6622898" y="3343205"/>
+                  </a:lnTo>
+                  <a:lnTo>
+                    <a:pt x="6694520" y="3348001"/>
+                  </a:lnTo>
+                  <a:lnTo>
+                    <a:pt x="6766143" y="3352633"/>
+                  </a:lnTo>
+                  <a:lnTo>
+                    <a:pt x="6837765" y="3357106"/>
+                  </a:lnTo>
+                  <a:lnTo>
+                    <a:pt x="6909388" y="3361427"/>
                   </a:lnTo>
                 </a:path>
               </a:pathLst>
@@ -5699,7 +5699,7 @@
                   <a:latin typeface="Helvetica"/>
                   <a:cs typeface="Helvetica"/>
                 </a:rPr>
-                <a:t>subHR per 10 % decline: 1.58 (1.19-2.08), p_Bonf = 0.008 (n = 6)  |  per IQR decline (Δ = 25.8 %): 3.24 (1.58-6.64)  |  IQR: [-10.7, 15.1] %</a:t>
+                <a:t>subHR per 10 % decline: 1.58 (1.19-2.08), p_Bonf = 0.008 (n = 6)  |  per IQR decline (Δ = 25.8 %): 3.23 (1.58-6.62)  |  IQR: [-10.7, 15.1] %</a:t>
               </a:r>
             </a:p>
           </p:txBody>
